--- a/presentations/NS_L08_PacketSniffers_Lesson.pptx
+++ b/presentations/NS_L08_PacketSniffers_Lesson.pptx
@@ -19,9 +19,10 @@
     <p:sldId id="267" r:id="rId13"/>
     <p:sldId id="268" r:id="rId14"/>
     <p:sldId id="269" r:id="rId15"/>
+    <p:sldId id="270" r:id="rId16"/>
   </p:sldIdLst>
   <p:notesMasterIdLst>
-    <p:notesMasterId r:id="rId16"/>
+    <p:notesMasterId r:id="rId17"/>
   </p:notesMasterIdLst>
   <p:sldSz cx="12192000" cy="6858000"/>
   <p:notesSz cx="6858000" cy="12192000"/>
@@ -692,7 +693,13 @@
           <a:p>
             <a:r>
               <a:rPr lang="en-US" dirty="0"/>
-              <a:t>Make them commit to an answer on paper before they tap the star. Guessing first costs them the learning.</a:t>
+              <a:t>The answer is D: An open network with a convincing name and no password.
+Do not say it yet. Every pupil commits first - fingers, whiteboards or a show of hands on each letter in turn - and you count the split before anyone can change their mind.
+IF MOST OF THE CLASS IS RIGHT: say why it is right in one sentence and go straight on to the independent work.
+IF A SIGNIFICANT GROUP IS ON ONE WRONG LETTER: that option is the misconception to teach against before anyone goes on. Go back to station 3, Man in the middle, and work through its example again, aloud, with the class watching, then re-ask this question.
+The course's own response to a wrong answer here: Open networks give attackers the easiest route in.
+A limitation, stated rather than papered over: one response covers every wrong option; it does not say what to revisit for each one. The course does not record what each separate wrong option means, and this slide does not invent it. Decide your own reteach for each option before the lesson; the options above are the start of it.
+This is a real activity from the experience (ns-l08-s3-c2), so the wording here is the wording a pupil will see.</a:t>
             </a:r>
             <a:endParaRPr lang="en-US" dirty="0"/>
           </a:p>
@@ -780,7 +787,7 @@
           <a:p>
             <a:r>
               <a:rPr lang="en-US" dirty="0"/>
-              <a:t>Use these as a settler, or as something for early finishers to read in the experience.</a:t>
+              <a:t>Make them commit to an answer on paper before they tap the star. Guessing first costs them the learning.</a:t>
             </a:r>
             <a:endParaRPr lang="en-US" dirty="0"/>
           </a:p>
@@ -868,7 +875,7 @@
           <a:p>
             <a:r>
               <a:rPr lang="en-US" dirty="0"/>
-              <a:t>Timed and silent. Mark against the answer sheet, then ask students to record their weakest area.</a:t>
+              <a:t>Use these as a settler, or as something for early finishers to read in the experience.</a:t>
             </a:r>
             <a:endParaRPr lang="en-US" dirty="0"/>
           </a:p>
@@ -956,7 +963,7 @@
           <a:p>
             <a:r>
               <a:rPr lang="en-US" dirty="0"/>
-              <a:t>Students copy their score-screen breakdown onto the worksheet, then rate themselves here.</a:t>
+              <a:t>Timed and silent. Mark against the answer sheet, then ask students to record their weakest area.</a:t>
             </a:r>
             <a:endParaRPr lang="en-US" dirty="0"/>
           </a:p>
@@ -980,6 +987,94 @@
             <a:fld id="{F7021451-1387-4CA6-816F-3879F97B5CBC}" type="slidenum">
               <a:rPr lang="en-US"/>
               <a:t>14</a:t>
+            </a:fld>
+            <a:endParaRPr lang="en-US"/>
+          </a:p>
+        </p:txBody>
+      </p:sp>
+    </p:spTree>
+    <p:extLst>
+      <p:ext uri="{BB962C8B-B14F-4D97-AF65-F5344CB8AC3E}">
+        <p14:creationId xmlns:p14="http://schemas.microsoft.com/office/powerpoint/2010/main" val="1024086991"/>
+      </p:ext>
+    </p:extLst>
+  </p:cSld>
+  <p:clrMapOvr>
+    <a:masterClrMapping/>
+  </p:clrMapOvr>
+</p:notes>
+</file>
+
+<file path=ppt/notesSlides/notesSlide15.xml><?xml version="1.0" encoding="utf-8"?>
+<p:notes xmlns:a="http://schemas.openxmlformats.org/drawingml/2006/main" xmlns:r="http://schemas.openxmlformats.org/officeDocument/2006/relationships" xmlns:p="http://schemas.openxmlformats.org/presentationml/2006/main">
+  <p:cSld>
+    <p:spTree>
+      <p:nvGrpSpPr>
+        <p:cNvPr id="1" name=""/>
+        <p:cNvGrpSpPr/>
+        <p:nvPr/>
+      </p:nvGrpSpPr>
+      <p:grpSpPr>
+        <a:xfrm>
+          <a:off x="0" y="0"/>
+          <a:ext cx="0" cy="0"/>
+          <a:chOff x="0" y="0"/>
+          <a:chExt cx="0" cy="0"/>
+        </a:xfrm>
+      </p:grpSpPr>
+      <p:sp>
+        <p:nvSpPr>
+          <p:cNvPr id="2" name="Slide Image Placeholder 1"/>
+          <p:cNvSpPr>
+            <a:spLocks noGrp="1" noRot="1" noChangeAspect="1"/>
+          </p:cNvSpPr>
+          <p:nvPr>
+            <p:ph type="sldImg"/>
+          </p:nvPr>
+        </p:nvSpPr>
+        <p:spPr/>
+      </p:sp>
+      <p:sp>
+        <p:nvSpPr>
+          <p:cNvPr id="3" name="Notes Placeholder 2"/>
+          <p:cNvSpPr>
+            <a:spLocks noGrp="1"/>
+          </p:cNvSpPr>
+          <p:nvPr>
+            <p:ph type="body" idx="1"/>
+          </p:nvPr>
+        </p:nvSpPr>
+        <p:spPr/>
+        <p:txBody>
+          <a:bodyPr/>
+          <a:lstStyle/>
+          <a:p>
+            <a:r>
+              <a:rPr lang="en-US" dirty="0"/>
+              <a:t>Students copy their score-screen breakdown onto the worksheet, then rate themselves here.</a:t>
+            </a:r>
+            <a:endParaRPr lang="en-US" dirty="0"/>
+          </a:p>
+        </p:txBody>
+      </p:sp>
+      <p:sp>
+        <p:nvSpPr>
+          <p:cNvPr id="4" name="Slide Number Placeholder 3"/>
+          <p:cNvSpPr>
+            <a:spLocks noGrp="1"/>
+          </p:cNvSpPr>
+          <p:nvPr>
+            <p:ph type="sldNum" sz="quarter" idx="10"/>
+          </p:nvPr>
+        </p:nvSpPr>
+        <p:spPr/>
+        <p:txBody>
+          <a:bodyPr/>
+          <a:lstStyle/>
+          <a:p>
+            <a:fld id="{F7021451-1387-4CA6-816F-3879F97B5CBC}" type="slidenum">
+              <a:rPr lang="en-US"/>
+              <a:t>15</a:t>
             </a:fld>
             <a:endParaRPr lang="en-US"/>
           </a:p>
@@ -2973,12 +3068,12 @@
         </p:nvSpPr>
         <p:spPr>
           <a:xfrm>
-            <a:off x="502920" y="438912"/>
-            <a:ext cx="3108960" cy="502920"/>
+            <a:off x="502920" y="457200"/>
+            <a:ext cx="1051560" cy="420624"/>
           </a:xfrm>
           <a:prstGeom prst="roundRect">
             <a:avLst>
-              <a:gd name="adj" fmla="val 18182"/>
+              <a:gd name="adj" fmla="val 21739"/>
             </a:avLst>
           </a:prstGeom>
           <a:solidFill>
@@ -2995,8 +3090,8 @@
         </p:nvSpPr>
         <p:spPr>
           <a:xfrm>
-            <a:off x="502920" y="438912"/>
-            <a:ext cx="3108960" cy="502920"/>
+            <a:off x="502920" y="457200"/>
+            <a:ext cx="1051560" cy="420624"/>
           </a:xfrm>
           <a:prstGeom prst="rect">
             <a:avLst/>
@@ -3012,7 +3107,7 @@
               <a:buNone/>
             </a:pPr>
             <a:r>
-              <a:rPr lang="en-US" sz="1300" b="1" dirty="0">
+              <a:rPr lang="en-US" sz="1200" b="1" dirty="0">
                 <a:solidFill>
                   <a:srgbClr val="101828"/>
                 </a:solidFill>
@@ -3020,9 +3115,9 @@
                 <a:ea typeface="IBM Plex Mono" pitchFamily="34" charset="-122"/>
                 <a:cs typeface="IBM Plex Mono" pitchFamily="34" charset="-120"/>
               </a:rPr>
-              <a:t>★  FINAL CHALLENGE</a:t>
-            </a:r>
-            <a:endParaRPr lang="en-US" sz="1300" dirty="0"/>
+              <a:t>CHECK</a:t>
+            </a:r>
+            <a:endParaRPr lang="en-US" sz="1200" dirty="0"/>
           </a:p>
         </p:txBody>
       </p:sp>
@@ -3034,8 +3129,8 @@
         </p:nvSpPr>
         <p:spPr>
           <a:xfrm>
-            <a:off x="502920" y="1097280"/>
-            <a:ext cx="11155680" cy="731520"/>
+            <a:off x="1737360" y="457200"/>
+            <a:ext cx="9875520" cy="420624"/>
           </a:xfrm>
           <a:prstGeom prst="rect">
             <a:avLst/>
@@ -3051,34 +3146,76 @@
               <a:buNone/>
             </a:pPr>
             <a:r>
-              <a:rPr lang="en-US" sz="3400" b="1" dirty="0">
-                <a:solidFill>
-                  <a:srgbClr val="101828"/>
+              <a:rPr lang="en-US" sz="1500" dirty="0">
+                <a:solidFill>
+                  <a:srgbClr val="667085"/>
                 </a:solidFill>
                 <a:latin typeface="IBM Plex Sans" pitchFamily="34" charset="0"/>
                 <a:ea typeface="IBM Plex Sans" pitchFamily="34" charset="-122"/>
                 <a:cs typeface="IBM Plex Sans" pitchFamily="34" charset="-120"/>
               </a:rPr>
-              <a:t>Safe or risky?</a:t>
-            </a:r>
-            <a:endParaRPr lang="en-US" sz="3400" dirty="0"/>
-          </a:p>
-        </p:txBody>
-      </p:sp>
-      <p:sp>
-        <p:nvSpPr>
-          <p:cNvPr id="8" name="Shape 6"/>
+              <a:t>Hands down. Everyone commits.</a:t>
+            </a:r>
+            <a:endParaRPr lang="en-US" sz="1500" dirty="0"/>
+          </a:p>
+        </p:txBody>
+      </p:sp>
+      <p:sp>
+        <p:nvSpPr>
+          <p:cNvPr id="8" name="Text 6"/>
+          <p:cNvSpPr txBox="1"/>
+          <p:nvPr/>
+        </p:nvSpPr>
+        <p:spPr>
+          <a:xfrm>
+            <a:off x="502920" y="1097280"/>
+            <a:ext cx="11155680" cy="914400"/>
+          </a:xfrm>
+          <a:prstGeom prst="rect">
+            <a:avLst/>
+          </a:prstGeom>
+          <a:noFill/>
+          <a:ln/>
+        </p:spPr>
+        <p:txBody>
+          <a:bodyPr wrap="square" lIns="0" tIns="0" rIns="0" bIns="0" rtlCol="0" anchor="ctr"/>
+          <a:lstStyle/>
+          <a:p>
+            <a:pPr indent="0" marL="0">
+              <a:lnSpc>
+                <a:spcPct val="115000"/>
+              </a:lnSpc>
+              <a:buNone/>
+            </a:pPr>
+            <a:r>
+              <a:rPr lang="en-US" sz="2600" b="1" dirty="0">
+                <a:solidFill>
+                  <a:srgbClr val="101828"/>
+                </a:solidFill>
+                <a:latin typeface="IBM Plex Sans" pitchFamily="34" charset="0"/>
+                <a:ea typeface="IBM Plex Sans" pitchFamily="34" charset="-122"/>
+                <a:cs typeface="IBM Plex Sans" pitchFamily="34" charset="-120"/>
+              </a:rPr>
+              <a:t>Which warning sign might suggest a fake hotspot?</a:t>
+            </a:r>
+            <a:endParaRPr lang="en-US" sz="2600" dirty="0"/>
+          </a:p>
+        </p:txBody>
+      </p:sp>
+      <p:sp>
+        <p:nvSpPr>
+          <p:cNvPr id="9" name="Shape 7"/>
           <p:cNvSpPr/>
           <p:nvPr/>
         </p:nvSpPr>
         <p:spPr>
           <a:xfrm>
-            <a:off x="502920" y="2011680"/>
-            <a:ext cx="11155680" cy="2194560"/>
+            <a:off x="502920" y="2148840"/>
+            <a:ext cx="11155680" cy="731520"/>
           </a:xfrm>
           <a:prstGeom prst="roundRect">
             <a:avLst>
-              <a:gd name="adj" fmla="val 5000"/>
+              <a:gd name="adj" fmla="val 15000"/>
             </a:avLst>
           </a:prstGeom>
           <a:solidFill>
@@ -3086,7 +3223,7 @@
           </a:solidFill>
           <a:ln w="15875">
             <a:solidFill>
-              <a:srgbClr val="2D63FF"/>
+              <a:srgbClr val="D9DEE7"/>
             </a:solidFill>
             <a:prstDash val="solid"/>
           </a:ln>
@@ -3094,14 +3231,75 @@
       </p:sp>
       <p:sp>
         <p:nvSpPr>
-          <p:cNvPr id="9" name="Text 7"/>
-          <p:cNvSpPr txBox="1"/>
-          <p:nvPr/>
-        </p:nvSpPr>
-        <p:spPr>
-          <a:xfrm>
-            <a:off x="1005840" y="2331720"/>
-            <a:ext cx="10149840" cy="1554480"/>
+          <p:cNvPr id="10" name="Shape 8"/>
+          <p:cNvSpPr/>
+          <p:nvPr/>
+        </p:nvSpPr>
+        <p:spPr>
+          <a:xfrm>
+            <a:off x="777240" y="2295144"/>
+            <a:ext cx="438912" cy="438912"/>
+          </a:xfrm>
+          <a:prstGeom prst="roundRect">
+            <a:avLst>
+              <a:gd name="adj" fmla="val 20833"/>
+            </a:avLst>
+          </a:prstGeom>
+          <a:solidFill>
+            <a:srgbClr val="EEF2FB"/>
+          </a:solidFill>
+          <a:ln/>
+        </p:spPr>
+      </p:sp>
+      <p:sp>
+        <p:nvSpPr>
+          <p:cNvPr id="11" name="Text 9"/>
+          <p:cNvSpPr txBox="1"/>
+          <p:nvPr/>
+        </p:nvSpPr>
+        <p:spPr>
+          <a:xfrm>
+            <a:off x="777240" y="2295144"/>
+            <a:ext cx="438912" cy="438912"/>
+          </a:xfrm>
+          <a:prstGeom prst="rect">
+            <a:avLst/>
+          </a:prstGeom>
+          <a:noFill/>
+          <a:ln/>
+        </p:spPr>
+        <p:txBody>
+          <a:bodyPr wrap="square" lIns="0" tIns="0" rIns="0" bIns="0" rtlCol="0" anchor="ctr"/>
+          <a:lstStyle/>
+          <a:p>
+            <a:pPr algn="ctr" indent="0" marL="0">
+              <a:buNone/>
+            </a:pPr>
+            <a:r>
+              <a:rPr lang="en-US" sz="1300" b="1" dirty="0">
+                <a:solidFill>
+                  <a:srgbClr val="2D63FF"/>
+                </a:solidFill>
+                <a:latin typeface="IBM Plex Mono" pitchFamily="34" charset="0"/>
+                <a:ea typeface="IBM Plex Mono" pitchFamily="34" charset="-122"/>
+                <a:cs typeface="IBM Plex Mono" pitchFamily="34" charset="-120"/>
+              </a:rPr>
+              <a:t>A</a:t>
+            </a:r>
+            <a:endParaRPr lang="en-US" sz="1300" dirty="0"/>
+          </a:p>
+        </p:txBody>
+      </p:sp>
+      <p:sp>
+        <p:nvSpPr>
+          <p:cNvPr id="12" name="Text 10"/>
+          <p:cNvSpPr txBox="1"/>
+          <p:nvPr/>
+        </p:nvSpPr>
+        <p:spPr>
+          <a:xfrm>
+            <a:off x="1417320" y="2148840"/>
+            <a:ext cx="10058400" cy="731520"/>
           </a:xfrm>
           <a:prstGeom prst="rect">
             <a:avLst/>
@@ -3115,12 +3313,12 @@
           <a:p>
             <a:pPr indent="0" marL="0">
               <a:lnSpc>
-                <a:spcPct val="130000"/>
+                <a:spcPct val="115000"/>
               </a:lnSpc>
               <a:buNone/>
             </a:pPr>
             <a:r>
-              <a:rPr lang="en-US" sz="2200" dirty="0">
+              <a:rPr lang="en-US" sz="1700" dirty="0">
                 <a:solidFill>
                   <a:srgbClr val="101828"/>
                 </a:solidFill>
@@ -3128,22 +3326,110 @@
                 <a:ea typeface="IBM Plex Sans" pitchFamily="34" charset="-122"/>
                 <a:cs typeface="IBM Plex Sans" pitchFamily="34" charset="-120"/>
               </a:rPr>
-              <a:t>Eight habits from around the office. Tap the star and sort each one into safe or risky for data interception and theft.</a:t>
-            </a:r>
-            <a:endParaRPr lang="en-US" sz="2200" dirty="0"/>
-          </a:p>
-        </p:txBody>
-      </p:sp>
-      <p:sp>
-        <p:nvSpPr>
-          <p:cNvPr id="10" name="Text 8"/>
-          <p:cNvSpPr txBox="1"/>
-          <p:nvPr/>
-        </p:nvSpPr>
-        <p:spPr>
-          <a:xfrm>
-            <a:off x="502920" y="4526280"/>
-            <a:ext cx="11155680" cy="457200"/>
+              <a:t>A network that asks for WPA2 security</a:t>
+            </a:r>
+            <a:endParaRPr lang="en-US" sz="1700" dirty="0"/>
+          </a:p>
+        </p:txBody>
+      </p:sp>
+      <p:sp>
+        <p:nvSpPr>
+          <p:cNvPr id="13" name="Shape 11"/>
+          <p:cNvSpPr/>
+          <p:nvPr/>
+        </p:nvSpPr>
+        <p:spPr>
+          <a:xfrm>
+            <a:off x="502920" y="3017520"/>
+            <a:ext cx="11155680" cy="731520"/>
+          </a:xfrm>
+          <a:prstGeom prst="roundRect">
+            <a:avLst>
+              <a:gd name="adj" fmla="val 15000"/>
+            </a:avLst>
+          </a:prstGeom>
+          <a:solidFill>
+            <a:srgbClr val="FFFFFF"/>
+          </a:solidFill>
+          <a:ln w="15875">
+            <a:solidFill>
+              <a:srgbClr val="D9DEE7"/>
+            </a:solidFill>
+            <a:prstDash val="solid"/>
+          </a:ln>
+        </p:spPr>
+      </p:sp>
+      <p:sp>
+        <p:nvSpPr>
+          <p:cNvPr id="14" name="Shape 12"/>
+          <p:cNvSpPr/>
+          <p:nvPr/>
+        </p:nvSpPr>
+        <p:spPr>
+          <a:xfrm>
+            <a:off x="777240" y="3163824"/>
+            <a:ext cx="438912" cy="438912"/>
+          </a:xfrm>
+          <a:prstGeom prst="roundRect">
+            <a:avLst>
+              <a:gd name="adj" fmla="val 20833"/>
+            </a:avLst>
+          </a:prstGeom>
+          <a:solidFill>
+            <a:srgbClr val="EEF2FB"/>
+          </a:solidFill>
+          <a:ln/>
+        </p:spPr>
+      </p:sp>
+      <p:sp>
+        <p:nvSpPr>
+          <p:cNvPr id="15" name="Text 13"/>
+          <p:cNvSpPr txBox="1"/>
+          <p:nvPr/>
+        </p:nvSpPr>
+        <p:spPr>
+          <a:xfrm>
+            <a:off x="777240" y="3163824"/>
+            <a:ext cx="438912" cy="438912"/>
+          </a:xfrm>
+          <a:prstGeom prst="rect">
+            <a:avLst/>
+          </a:prstGeom>
+          <a:noFill/>
+          <a:ln/>
+        </p:spPr>
+        <p:txBody>
+          <a:bodyPr wrap="square" lIns="0" tIns="0" rIns="0" bIns="0" rtlCol="0" anchor="ctr"/>
+          <a:lstStyle/>
+          <a:p>
+            <a:pPr algn="ctr" indent="0" marL="0">
+              <a:buNone/>
+            </a:pPr>
+            <a:r>
+              <a:rPr lang="en-US" sz="1300" b="1" dirty="0">
+                <a:solidFill>
+                  <a:srgbClr val="2D63FF"/>
+                </a:solidFill>
+                <a:latin typeface="IBM Plex Mono" pitchFamily="34" charset="0"/>
+                <a:ea typeface="IBM Plex Mono" pitchFamily="34" charset="-122"/>
+                <a:cs typeface="IBM Plex Mono" pitchFamily="34" charset="-120"/>
+              </a:rPr>
+              <a:t>B</a:t>
+            </a:r>
+            <a:endParaRPr lang="en-US" sz="1300" dirty="0"/>
+          </a:p>
+        </p:txBody>
+      </p:sp>
+      <p:sp>
+        <p:nvSpPr>
+          <p:cNvPr id="16" name="Text 14"/>
+          <p:cNvSpPr txBox="1"/>
+          <p:nvPr/>
+        </p:nvSpPr>
+        <p:spPr>
+          <a:xfrm>
+            <a:off x="1417320" y="3017520"/>
+            <a:ext cx="10058400" cy="731520"/>
           </a:xfrm>
           <a:prstGeom prst="rect">
             <a:avLst/>
@@ -3156,20 +3442,283 @@
           <a:lstStyle/>
           <a:p>
             <a:pPr indent="0" marL="0">
-              <a:buNone/>
-            </a:pPr>
-            <a:r>
-              <a:rPr lang="en-US" sz="1600" dirty="0">
-                <a:solidFill>
-                  <a:srgbClr val="667085"/>
+              <a:lnSpc>
+                <a:spcPct val="115000"/>
+              </a:lnSpc>
+              <a:buNone/>
+            </a:pPr>
+            <a:r>
+              <a:rPr lang="en-US" sz="1700" dirty="0">
+                <a:solidFill>
+                  <a:srgbClr val="101828"/>
                 </a:solidFill>
                 <a:latin typeface="IBM Plex Sans" pitchFamily="34" charset="0"/>
                 <a:ea typeface="IBM Plex Sans" pitchFamily="34" charset="-122"/>
                 <a:cs typeface="IBM Plex Sans" pitchFamily="34" charset="-120"/>
               </a:rPr>
-              <a:t>Predict on paper first, then look down and test it.</a:t>
-            </a:r>
-            <a:endParaRPr lang="en-US" sz="1600" dirty="0"/>
+              <a:t>A network with a padlock icon</a:t>
+            </a:r>
+            <a:endParaRPr lang="en-US" sz="1700" dirty="0"/>
+          </a:p>
+        </p:txBody>
+      </p:sp>
+      <p:sp>
+        <p:nvSpPr>
+          <p:cNvPr id="17" name="Shape 15"/>
+          <p:cNvSpPr/>
+          <p:nvPr/>
+        </p:nvSpPr>
+        <p:spPr>
+          <a:xfrm>
+            <a:off x="502920" y="3886200"/>
+            <a:ext cx="11155680" cy="731520"/>
+          </a:xfrm>
+          <a:prstGeom prst="roundRect">
+            <a:avLst>
+              <a:gd name="adj" fmla="val 15000"/>
+            </a:avLst>
+          </a:prstGeom>
+          <a:solidFill>
+            <a:srgbClr val="FFFFFF"/>
+          </a:solidFill>
+          <a:ln w="15875">
+            <a:solidFill>
+              <a:srgbClr val="D9DEE7"/>
+            </a:solidFill>
+            <a:prstDash val="solid"/>
+          </a:ln>
+        </p:spPr>
+      </p:sp>
+      <p:sp>
+        <p:nvSpPr>
+          <p:cNvPr id="18" name="Shape 16"/>
+          <p:cNvSpPr/>
+          <p:nvPr/>
+        </p:nvSpPr>
+        <p:spPr>
+          <a:xfrm>
+            <a:off x="777240" y="4032504"/>
+            <a:ext cx="438912" cy="438912"/>
+          </a:xfrm>
+          <a:prstGeom prst="roundRect">
+            <a:avLst>
+              <a:gd name="adj" fmla="val 20833"/>
+            </a:avLst>
+          </a:prstGeom>
+          <a:solidFill>
+            <a:srgbClr val="EEF2FB"/>
+          </a:solidFill>
+          <a:ln/>
+        </p:spPr>
+      </p:sp>
+      <p:sp>
+        <p:nvSpPr>
+          <p:cNvPr id="19" name="Text 17"/>
+          <p:cNvSpPr txBox="1"/>
+          <p:nvPr/>
+        </p:nvSpPr>
+        <p:spPr>
+          <a:xfrm>
+            <a:off x="777240" y="4032504"/>
+            <a:ext cx="438912" cy="438912"/>
+          </a:xfrm>
+          <a:prstGeom prst="rect">
+            <a:avLst/>
+          </a:prstGeom>
+          <a:noFill/>
+          <a:ln/>
+        </p:spPr>
+        <p:txBody>
+          <a:bodyPr wrap="square" lIns="0" tIns="0" rIns="0" bIns="0" rtlCol="0" anchor="ctr"/>
+          <a:lstStyle/>
+          <a:p>
+            <a:pPr algn="ctr" indent="0" marL="0">
+              <a:buNone/>
+            </a:pPr>
+            <a:r>
+              <a:rPr lang="en-US" sz="1300" b="1" dirty="0">
+                <a:solidFill>
+                  <a:srgbClr val="2D63FF"/>
+                </a:solidFill>
+                <a:latin typeface="IBM Plex Mono" pitchFamily="34" charset="0"/>
+                <a:ea typeface="IBM Plex Mono" pitchFamily="34" charset="-122"/>
+                <a:cs typeface="IBM Plex Mono" pitchFamily="34" charset="-120"/>
+              </a:rPr>
+              <a:t>C</a:t>
+            </a:r>
+            <a:endParaRPr lang="en-US" sz="1300" dirty="0"/>
+          </a:p>
+        </p:txBody>
+      </p:sp>
+      <p:sp>
+        <p:nvSpPr>
+          <p:cNvPr id="20" name="Text 18"/>
+          <p:cNvSpPr txBox="1"/>
+          <p:nvPr/>
+        </p:nvSpPr>
+        <p:spPr>
+          <a:xfrm>
+            <a:off x="1417320" y="3886200"/>
+            <a:ext cx="10058400" cy="731520"/>
+          </a:xfrm>
+          <a:prstGeom prst="rect">
+            <a:avLst/>
+          </a:prstGeom>
+          <a:noFill/>
+          <a:ln/>
+        </p:spPr>
+        <p:txBody>
+          <a:bodyPr wrap="square" lIns="0" tIns="0" rIns="0" bIns="0" rtlCol="0" anchor="ctr"/>
+          <a:lstStyle/>
+          <a:p>
+            <a:pPr indent="0" marL="0">
+              <a:lnSpc>
+                <a:spcPct val="115000"/>
+              </a:lnSpc>
+              <a:buNone/>
+            </a:pPr>
+            <a:r>
+              <a:rPr lang="en-US" sz="1700" dirty="0">
+                <a:solidFill>
+                  <a:srgbClr val="101828"/>
+                </a:solidFill>
+                <a:latin typeface="IBM Plex Sans" pitchFamily="34" charset="0"/>
+                <a:ea typeface="IBM Plex Sans" pitchFamily="34" charset="-122"/>
+                <a:cs typeface="IBM Plex Sans" pitchFamily="34" charset="-120"/>
+              </a:rPr>
+              <a:t>A network named after your own router</a:t>
+            </a:r>
+            <a:endParaRPr lang="en-US" sz="1700" dirty="0"/>
+          </a:p>
+        </p:txBody>
+      </p:sp>
+      <p:sp>
+        <p:nvSpPr>
+          <p:cNvPr id="21" name="Shape 19"/>
+          <p:cNvSpPr/>
+          <p:nvPr/>
+        </p:nvSpPr>
+        <p:spPr>
+          <a:xfrm>
+            <a:off x="502920" y="4754880"/>
+            <a:ext cx="11155680" cy="731520"/>
+          </a:xfrm>
+          <a:prstGeom prst="roundRect">
+            <a:avLst>
+              <a:gd name="adj" fmla="val 15000"/>
+            </a:avLst>
+          </a:prstGeom>
+          <a:solidFill>
+            <a:srgbClr val="FFFFFF"/>
+          </a:solidFill>
+          <a:ln w="15875">
+            <a:solidFill>
+              <a:srgbClr val="D9DEE7"/>
+            </a:solidFill>
+            <a:prstDash val="solid"/>
+          </a:ln>
+        </p:spPr>
+      </p:sp>
+      <p:sp>
+        <p:nvSpPr>
+          <p:cNvPr id="22" name="Shape 20"/>
+          <p:cNvSpPr/>
+          <p:nvPr/>
+        </p:nvSpPr>
+        <p:spPr>
+          <a:xfrm>
+            <a:off x="777240" y="4901184"/>
+            <a:ext cx="438912" cy="438912"/>
+          </a:xfrm>
+          <a:prstGeom prst="roundRect">
+            <a:avLst>
+              <a:gd name="adj" fmla="val 20833"/>
+            </a:avLst>
+          </a:prstGeom>
+          <a:solidFill>
+            <a:srgbClr val="EEF2FB"/>
+          </a:solidFill>
+          <a:ln/>
+        </p:spPr>
+      </p:sp>
+      <p:sp>
+        <p:nvSpPr>
+          <p:cNvPr id="23" name="Text 21"/>
+          <p:cNvSpPr txBox="1"/>
+          <p:nvPr/>
+        </p:nvSpPr>
+        <p:spPr>
+          <a:xfrm>
+            <a:off x="777240" y="4901184"/>
+            <a:ext cx="438912" cy="438912"/>
+          </a:xfrm>
+          <a:prstGeom prst="rect">
+            <a:avLst/>
+          </a:prstGeom>
+          <a:noFill/>
+          <a:ln/>
+        </p:spPr>
+        <p:txBody>
+          <a:bodyPr wrap="square" lIns="0" tIns="0" rIns="0" bIns="0" rtlCol="0" anchor="ctr"/>
+          <a:lstStyle/>
+          <a:p>
+            <a:pPr algn="ctr" indent="0" marL="0">
+              <a:buNone/>
+            </a:pPr>
+            <a:r>
+              <a:rPr lang="en-US" sz="1300" b="1" dirty="0">
+                <a:solidFill>
+                  <a:srgbClr val="2D63FF"/>
+                </a:solidFill>
+                <a:latin typeface="IBM Plex Mono" pitchFamily="34" charset="0"/>
+                <a:ea typeface="IBM Plex Mono" pitchFamily="34" charset="-122"/>
+                <a:cs typeface="IBM Plex Mono" pitchFamily="34" charset="-120"/>
+              </a:rPr>
+              <a:t>D</a:t>
+            </a:r>
+            <a:endParaRPr lang="en-US" sz="1300" dirty="0"/>
+          </a:p>
+        </p:txBody>
+      </p:sp>
+      <p:sp>
+        <p:nvSpPr>
+          <p:cNvPr id="24" name="Text 22"/>
+          <p:cNvSpPr txBox="1"/>
+          <p:nvPr/>
+        </p:nvSpPr>
+        <p:spPr>
+          <a:xfrm>
+            <a:off x="1417320" y="4754880"/>
+            <a:ext cx="10058400" cy="731520"/>
+          </a:xfrm>
+          <a:prstGeom prst="rect">
+            <a:avLst/>
+          </a:prstGeom>
+          <a:noFill/>
+          <a:ln/>
+        </p:spPr>
+        <p:txBody>
+          <a:bodyPr wrap="square" lIns="0" tIns="0" rIns="0" bIns="0" rtlCol="0" anchor="ctr"/>
+          <a:lstStyle/>
+          <a:p>
+            <a:pPr indent="0" marL="0">
+              <a:lnSpc>
+                <a:spcPct val="115000"/>
+              </a:lnSpc>
+              <a:buNone/>
+            </a:pPr>
+            <a:r>
+              <a:rPr lang="en-US" sz="1700" dirty="0">
+                <a:solidFill>
+                  <a:srgbClr val="101828"/>
+                </a:solidFill>
+                <a:latin typeface="IBM Plex Sans" pitchFamily="34" charset="0"/>
+                <a:ea typeface="IBM Plex Sans" pitchFamily="34" charset="-122"/>
+                <a:cs typeface="IBM Plex Sans" pitchFamily="34" charset="-120"/>
+              </a:rPr>
+              <a:t>An open network with a convincing name and no password</a:t>
+            </a:r>
+            <a:endParaRPr lang="en-US" sz="1700" dirty="0"/>
           </a:p>
         </p:txBody>
       </p:sp>
@@ -3305,14 +3854,75 @@
       </p:sp>
       <p:sp>
         <p:nvSpPr>
-          <p:cNvPr id="5" name="Text 3"/>
-          <p:cNvSpPr txBox="1"/>
-          <p:nvPr/>
-        </p:nvSpPr>
-        <p:spPr>
-          <a:xfrm>
-            <a:off x="502920" y="411480"/>
-            <a:ext cx="11155680" cy="777240"/>
+          <p:cNvPr id="5" name="Shape 3"/>
+          <p:cNvSpPr/>
+          <p:nvPr/>
+        </p:nvSpPr>
+        <p:spPr>
+          <a:xfrm>
+            <a:off x="502920" y="438912"/>
+            <a:ext cx="3108960" cy="502920"/>
+          </a:xfrm>
+          <a:prstGeom prst="roundRect">
+            <a:avLst>
+              <a:gd name="adj" fmla="val 18182"/>
+            </a:avLst>
+          </a:prstGeom>
+          <a:solidFill>
+            <a:srgbClr val="F4B942"/>
+          </a:solidFill>
+          <a:ln/>
+        </p:spPr>
+      </p:sp>
+      <p:sp>
+        <p:nvSpPr>
+          <p:cNvPr id="6" name="Text 4"/>
+          <p:cNvSpPr txBox="1"/>
+          <p:nvPr/>
+        </p:nvSpPr>
+        <p:spPr>
+          <a:xfrm>
+            <a:off x="502920" y="438912"/>
+            <a:ext cx="3108960" cy="502920"/>
+          </a:xfrm>
+          <a:prstGeom prst="rect">
+            <a:avLst/>
+          </a:prstGeom>
+          <a:noFill/>
+          <a:ln/>
+        </p:spPr>
+        <p:txBody>
+          <a:bodyPr wrap="square" lIns="0" tIns="0" rIns="0" bIns="0" rtlCol="0" anchor="ctr"/>
+          <a:lstStyle/>
+          <a:p>
+            <a:pPr algn="ctr" indent="0" marL="0">
+              <a:buNone/>
+            </a:pPr>
+            <a:r>
+              <a:rPr lang="en-US" sz="1300" b="1" dirty="0">
+                <a:solidFill>
+                  <a:srgbClr val="101828"/>
+                </a:solidFill>
+                <a:latin typeface="IBM Plex Mono" pitchFamily="34" charset="0"/>
+                <a:ea typeface="IBM Plex Mono" pitchFamily="34" charset="-122"/>
+                <a:cs typeface="IBM Plex Mono" pitchFamily="34" charset="-120"/>
+              </a:rPr>
+              <a:t>★  FINAL CHALLENGE</a:t>
+            </a:r>
+            <a:endParaRPr lang="en-US" sz="1300" dirty="0"/>
+          </a:p>
+        </p:txBody>
+      </p:sp>
+      <p:sp>
+        <p:nvSpPr>
+          <p:cNvPr id="7" name="Text 5"/>
+          <p:cNvSpPr txBox="1"/>
+          <p:nvPr/>
+        </p:nvSpPr>
+        <p:spPr>
+          <a:xfrm>
+            <a:off x="502920" y="1097280"/>
+            <a:ext cx="11155680" cy="731520"/>
           </a:xfrm>
           <a:prstGeom prst="rect">
             <a:avLst/>
@@ -3328,7 +3938,7 @@
               <a:buNone/>
             </a:pPr>
             <a:r>
-              <a:rPr lang="en-US" sz="3200" b="1" dirty="0">
+              <a:rPr lang="en-US" sz="3400" b="1" dirty="0">
                 <a:solidFill>
                   <a:srgbClr val="101828"/>
                 </a:solidFill>
@@ -3336,65 +3946,26 @@
                 <a:ea typeface="IBM Plex Sans" pitchFamily="34" charset="-122"/>
                 <a:cs typeface="IBM Plex Sans" pitchFamily="34" charset="-120"/>
               </a:rPr>
-              <a:t>Worth knowing</a:t>
-            </a:r>
-            <a:endParaRPr lang="en-US" sz="3200" dirty="0"/>
-          </a:p>
-        </p:txBody>
-      </p:sp>
-      <p:sp>
-        <p:nvSpPr>
-          <p:cNvPr id="6" name="Text 4"/>
-          <p:cNvSpPr txBox="1"/>
-          <p:nvPr/>
-        </p:nvSpPr>
-        <p:spPr>
-          <a:xfrm>
-            <a:off x="502920" y="1170432"/>
-            <a:ext cx="11155680" cy="411480"/>
-          </a:xfrm>
-          <a:prstGeom prst="rect">
-            <a:avLst/>
-          </a:prstGeom>
-          <a:noFill/>
-          <a:ln/>
-        </p:spPr>
-        <p:txBody>
-          <a:bodyPr wrap="square" lIns="0" tIns="0" rIns="0" bIns="0" rtlCol="0" anchor="ctr"/>
-          <a:lstStyle/>
-          <a:p>
-            <a:pPr indent="0" marL="0">
-              <a:buNone/>
-            </a:pPr>
-            <a:r>
-              <a:rPr lang="en-US" sz="1500" dirty="0">
-                <a:solidFill>
-                  <a:srgbClr val="667085"/>
-                </a:solidFill>
-                <a:latin typeface="IBM Plex Sans" pitchFamily="34" charset="0"/>
-                <a:ea typeface="IBM Plex Sans" pitchFamily="34" charset="-122"/>
-                <a:cs typeface="IBM Plex Sans" pitchFamily="34" charset="-120"/>
-              </a:rPr>
-              <a:t>The information markers dotted around the room</a:t>
-            </a:r>
-            <a:endParaRPr lang="en-US" sz="1500" dirty="0"/>
-          </a:p>
-        </p:txBody>
-      </p:sp>
-      <p:sp>
-        <p:nvSpPr>
-          <p:cNvPr id="7" name="Shape 5"/>
+              <a:t>Safe or risky?</a:t>
+            </a:r>
+            <a:endParaRPr lang="en-US" sz="3400" dirty="0"/>
+          </a:p>
+        </p:txBody>
+      </p:sp>
+      <p:sp>
+        <p:nvSpPr>
+          <p:cNvPr id="8" name="Shape 6"/>
           <p:cNvSpPr/>
           <p:nvPr/>
         </p:nvSpPr>
         <p:spPr>
           <a:xfrm>
-            <a:off x="502920" y="1828800"/>
-            <a:ext cx="5394960" cy="1737360"/>
+            <a:off x="502920" y="2011680"/>
+            <a:ext cx="11155680" cy="2194560"/>
           </a:xfrm>
           <a:prstGeom prst="roundRect">
             <a:avLst>
-              <a:gd name="adj" fmla="val 6316"/>
+              <a:gd name="adj" fmla="val 5000"/>
             </a:avLst>
           </a:prstGeom>
           <a:solidFill>
@@ -3410,14 +3981,14 @@
       </p:sp>
       <p:sp>
         <p:nvSpPr>
-          <p:cNvPr id="8" name="Text 6"/>
-          <p:cNvSpPr txBox="1"/>
-          <p:nvPr/>
-        </p:nvSpPr>
-        <p:spPr>
-          <a:xfrm>
-            <a:off x="822960" y="2011680"/>
-            <a:ext cx="4754880" cy="365760"/>
+          <p:cNvPr id="9" name="Text 7"/>
+          <p:cNvSpPr txBox="1"/>
+          <p:nvPr/>
+        </p:nvSpPr>
+        <p:spPr>
+          <a:xfrm>
+            <a:off x="1005840" y="2331720"/>
+            <a:ext cx="10149840" cy="1554480"/>
           </a:xfrm>
           <a:prstGeom prst="rect">
             <a:avLst/>
@@ -3430,52 +4001,52 @@
           <a:lstStyle/>
           <a:p>
             <a:pPr indent="0" marL="0">
-              <a:buNone/>
-            </a:pPr>
-            <a:r>
-              <a:rPr lang="en-US" sz="1600" b="1" dirty="0">
-                <a:solidFill>
-                  <a:srgbClr val="2D63FF"/>
+              <a:lnSpc>
+                <a:spcPct val="130000"/>
+              </a:lnSpc>
+              <a:buNone/>
+            </a:pPr>
+            <a:r>
+              <a:rPr lang="en-US" sz="2200" dirty="0">
+                <a:solidFill>
+                  <a:srgbClr val="101828"/>
                 </a:solidFill>
                 <a:latin typeface="IBM Plex Sans" pitchFamily="34" charset="0"/>
                 <a:ea typeface="IBM Plex Sans" pitchFamily="34" charset="-122"/>
                 <a:cs typeface="IBM Plex Sans" pitchFamily="34" charset="-120"/>
               </a:rPr>
-              <a:t>Wireshark</a:t>
-            </a:r>
-            <a:endParaRPr lang="en-US" sz="1600" dirty="0"/>
-          </a:p>
-        </p:txBody>
-      </p:sp>
-      <p:sp>
-        <p:nvSpPr>
-          <p:cNvPr id="9" name="Text 7"/>
-          <p:cNvSpPr txBox="1"/>
-          <p:nvPr/>
-        </p:nvSpPr>
-        <p:spPr>
-          <a:xfrm>
-            <a:off x="822960" y="2395728"/>
-            <a:ext cx="4754880" cy="1005840"/>
-          </a:xfrm>
-          <a:prstGeom prst="rect">
-            <a:avLst/>
-          </a:prstGeom>
-          <a:noFill/>
-          <a:ln/>
-        </p:spPr>
-        <p:txBody>
-          <a:bodyPr wrap="square" lIns="0" tIns="0" rIns="0" bIns="0" rtlCol="0" anchor="t"/>
+              <a:t>Eight habits from around the office. Tap the star and sort each one into safe or risky for data interception and theft.</a:t>
+            </a:r>
+            <a:endParaRPr lang="en-US" sz="2200" dirty="0"/>
+          </a:p>
+        </p:txBody>
+      </p:sp>
+      <p:sp>
+        <p:nvSpPr>
+          <p:cNvPr id="10" name="Text 8"/>
+          <p:cNvSpPr txBox="1"/>
+          <p:nvPr/>
+        </p:nvSpPr>
+        <p:spPr>
+          <a:xfrm>
+            <a:off x="502920" y="4526280"/>
+            <a:ext cx="11155680" cy="457200"/>
+          </a:xfrm>
+          <a:prstGeom prst="rect">
+            <a:avLst/>
+          </a:prstGeom>
+          <a:noFill/>
+          <a:ln/>
+        </p:spPr>
+        <p:txBody>
+          <a:bodyPr wrap="square" lIns="0" tIns="0" rIns="0" bIns="0" rtlCol="0" anchor="ctr"/>
           <a:lstStyle/>
           <a:p>
             <a:pPr indent="0" marL="0">
-              <a:lnSpc>
-                <a:spcPct val="120000"/>
-              </a:lnSpc>
-              <a:buNone/>
-            </a:pPr>
-            <a:r>
-              <a:rPr lang="en-US" sz="1300" dirty="0">
+              <a:buNone/>
+            </a:pPr>
+            <a:r>
+              <a:rPr lang="en-US" sz="1600" dirty="0">
                 <a:solidFill>
                   <a:srgbClr val="667085"/>
                 </a:solidFill>
@@ -3483,333 +4054,9 @@
                 <a:ea typeface="IBM Plex Sans" pitchFamily="34" charset="-122"/>
                 <a:cs typeface="IBM Plex Sans" pitchFamily="34" charset="-120"/>
               </a:rPr>
-              <a:t>Wireshark is a free packet sniffer used by network managers worldwide. The same tool in the wrong hands is an attacker's dream.</a:t>
-            </a:r>
-            <a:endParaRPr lang="en-US" sz="1300" dirty="0"/>
-          </a:p>
-        </p:txBody>
-      </p:sp>
-      <p:sp>
-        <p:nvSpPr>
-          <p:cNvPr id="10" name="Shape 8"/>
-          <p:cNvSpPr/>
-          <p:nvPr/>
-        </p:nvSpPr>
-        <p:spPr>
-          <a:xfrm>
-            <a:off x="6217920" y="1828800"/>
-            <a:ext cx="5394960" cy="1737360"/>
-          </a:xfrm>
-          <a:prstGeom prst="roundRect">
-            <a:avLst>
-              <a:gd name="adj" fmla="val 6316"/>
-            </a:avLst>
-          </a:prstGeom>
-          <a:solidFill>
-            <a:srgbClr val="FFFFFF"/>
-          </a:solidFill>
-          <a:ln w="15875">
-            <a:solidFill>
-              <a:srgbClr val="08A6A6"/>
-            </a:solidFill>
-            <a:prstDash val="solid"/>
-          </a:ln>
-        </p:spPr>
-      </p:sp>
-      <p:sp>
-        <p:nvSpPr>
-          <p:cNvPr id="11" name="Text 9"/>
-          <p:cNvSpPr txBox="1"/>
-          <p:nvPr/>
-        </p:nvSpPr>
-        <p:spPr>
-          <a:xfrm>
-            <a:off x="6537960" y="2011680"/>
-            <a:ext cx="4754880" cy="365760"/>
-          </a:xfrm>
-          <a:prstGeom prst="rect">
-            <a:avLst/>
-          </a:prstGeom>
-          <a:noFill/>
-          <a:ln/>
-        </p:spPr>
-        <p:txBody>
-          <a:bodyPr wrap="square" lIns="0" tIns="0" rIns="0" bIns="0" rtlCol="0" anchor="ctr"/>
-          <a:lstStyle/>
-          <a:p>
-            <a:pPr indent="0" marL="0">
-              <a:buNone/>
-            </a:pPr>
-            <a:r>
-              <a:rPr lang="en-US" sz="1600" b="1" dirty="0">
-                <a:solidFill>
-                  <a:srgbClr val="08A6A6"/>
-                </a:solidFill>
-                <a:latin typeface="IBM Plex Sans" pitchFamily="34" charset="0"/>
-                <a:ea typeface="IBM Plex Sans" pitchFamily="34" charset="-122"/>
-                <a:cs typeface="IBM Plex Sans" pitchFamily="34" charset="-120"/>
-              </a:rPr>
-              <a:t>HTTPS everywhere</a:t>
+              <a:t>Predict on paper first, then look down and test it.</a:t>
             </a:r>
             <a:endParaRPr lang="en-US" sz="1600" dirty="0"/>
-          </a:p>
-        </p:txBody>
-      </p:sp>
-      <p:sp>
-        <p:nvSpPr>
-          <p:cNvPr id="12" name="Text 10"/>
-          <p:cNvSpPr txBox="1"/>
-          <p:nvPr/>
-        </p:nvSpPr>
-        <p:spPr>
-          <a:xfrm>
-            <a:off x="6537960" y="2395728"/>
-            <a:ext cx="4754880" cy="1005840"/>
-          </a:xfrm>
-          <a:prstGeom prst="rect">
-            <a:avLst/>
-          </a:prstGeom>
-          <a:noFill/>
-          <a:ln/>
-        </p:spPr>
-        <p:txBody>
-          <a:bodyPr wrap="square" lIns="0" tIns="0" rIns="0" bIns="0" rtlCol="0" anchor="t"/>
-          <a:lstStyle/>
-          <a:p>
-            <a:pPr indent="0" marL="0">
-              <a:lnSpc>
-                <a:spcPct val="120000"/>
-              </a:lnSpc>
-              <a:buNone/>
-            </a:pPr>
-            <a:r>
-              <a:rPr lang="en-US" sz="1300" dirty="0">
-                <a:solidFill>
-                  <a:srgbClr val="667085"/>
-                </a:solidFill>
-                <a:latin typeface="IBM Plex Sans" pitchFamily="34" charset="0"/>
-                <a:ea typeface="IBM Plex Sans" pitchFamily="34" charset="-122"/>
-                <a:cs typeface="IBM Plex Sans" pitchFamily="34" charset="-120"/>
-              </a:rPr>
-              <a:t>Most websites now use HTTPS by default, which is why intercepting browsing is far less useful than it once was.</a:t>
-            </a:r>
-            <a:endParaRPr lang="en-US" sz="1300" dirty="0"/>
-          </a:p>
-        </p:txBody>
-      </p:sp>
-      <p:sp>
-        <p:nvSpPr>
-          <p:cNvPr id="13" name="Shape 11"/>
-          <p:cNvSpPr/>
-          <p:nvPr/>
-        </p:nvSpPr>
-        <p:spPr>
-          <a:xfrm>
-            <a:off x="502920" y="3794760"/>
-            <a:ext cx="5394960" cy="1737360"/>
-          </a:xfrm>
-          <a:prstGeom prst="roundRect">
-            <a:avLst>
-              <a:gd name="adj" fmla="val 6316"/>
-            </a:avLst>
-          </a:prstGeom>
-          <a:solidFill>
-            <a:srgbClr val="FFFFFF"/>
-          </a:solidFill>
-          <a:ln w="15875">
-            <a:solidFill>
-              <a:srgbClr val="2D63FF"/>
-            </a:solidFill>
-            <a:prstDash val="solid"/>
-          </a:ln>
-        </p:spPr>
-      </p:sp>
-      <p:sp>
-        <p:nvSpPr>
-          <p:cNvPr id="14" name="Text 12"/>
-          <p:cNvSpPr txBox="1"/>
-          <p:nvPr/>
-        </p:nvSpPr>
-        <p:spPr>
-          <a:xfrm>
-            <a:off x="822960" y="3977640"/>
-            <a:ext cx="4754880" cy="365760"/>
-          </a:xfrm>
-          <a:prstGeom prst="rect">
-            <a:avLst/>
-          </a:prstGeom>
-          <a:noFill/>
-          <a:ln/>
-        </p:spPr>
-        <p:txBody>
-          <a:bodyPr wrap="square" lIns="0" tIns="0" rIns="0" bIns="0" rtlCol="0" anchor="ctr"/>
-          <a:lstStyle/>
-          <a:p>
-            <a:pPr indent="0" marL="0">
-              <a:buNone/>
-            </a:pPr>
-            <a:r>
-              <a:rPr lang="en-US" sz="1600" b="1" dirty="0">
-                <a:solidFill>
-                  <a:srgbClr val="2D63FF"/>
-                </a:solidFill>
-                <a:latin typeface="IBM Plex Sans" pitchFamily="34" charset="0"/>
-                <a:ea typeface="IBM Plex Sans" pitchFamily="34" charset="-122"/>
-                <a:cs typeface="IBM Plex Sans" pitchFamily="34" charset="-120"/>
-              </a:rPr>
-              <a:t>Evil twin</a:t>
-            </a:r>
-            <a:endParaRPr lang="en-US" sz="1600" dirty="0"/>
-          </a:p>
-        </p:txBody>
-      </p:sp>
-      <p:sp>
-        <p:nvSpPr>
-          <p:cNvPr id="15" name="Text 13"/>
-          <p:cNvSpPr txBox="1"/>
-          <p:nvPr/>
-        </p:nvSpPr>
-        <p:spPr>
-          <a:xfrm>
-            <a:off x="822960" y="4361688"/>
-            <a:ext cx="4754880" cy="1005840"/>
-          </a:xfrm>
-          <a:prstGeom prst="rect">
-            <a:avLst/>
-          </a:prstGeom>
-          <a:noFill/>
-          <a:ln/>
-        </p:spPr>
-        <p:txBody>
-          <a:bodyPr wrap="square" lIns="0" tIns="0" rIns="0" bIns="0" rtlCol="0" anchor="t"/>
-          <a:lstStyle/>
-          <a:p>
-            <a:pPr indent="0" marL="0">
-              <a:lnSpc>
-                <a:spcPct val="120000"/>
-              </a:lnSpc>
-              <a:buNone/>
-            </a:pPr>
-            <a:r>
-              <a:rPr lang="en-US" sz="1300" dirty="0">
-                <a:solidFill>
-                  <a:srgbClr val="667085"/>
-                </a:solidFill>
-                <a:latin typeface="IBM Plex Sans" pitchFamily="34" charset="0"/>
-                <a:ea typeface="IBM Plex Sans" pitchFamily="34" charset="-122"/>
-                <a:cs typeface="IBM Plex Sans" pitchFamily="34" charset="-120"/>
-              </a:rPr>
-              <a:t>A fake hotspot with the same name as a real one is called an evil twin. Phones may join it automatically.</a:t>
-            </a:r>
-            <a:endParaRPr lang="en-US" sz="1300" dirty="0"/>
-          </a:p>
-        </p:txBody>
-      </p:sp>
-      <p:sp>
-        <p:nvSpPr>
-          <p:cNvPr id="16" name="Shape 14"/>
-          <p:cNvSpPr/>
-          <p:nvPr/>
-        </p:nvSpPr>
-        <p:spPr>
-          <a:xfrm>
-            <a:off x="6217920" y="3794760"/>
-            <a:ext cx="5394960" cy="1737360"/>
-          </a:xfrm>
-          <a:prstGeom prst="roundRect">
-            <a:avLst>
-              <a:gd name="adj" fmla="val 6316"/>
-            </a:avLst>
-          </a:prstGeom>
-          <a:solidFill>
-            <a:srgbClr val="FFFFFF"/>
-          </a:solidFill>
-          <a:ln w="15875">
-            <a:solidFill>
-              <a:srgbClr val="08A6A6"/>
-            </a:solidFill>
-            <a:prstDash val="solid"/>
-          </a:ln>
-        </p:spPr>
-      </p:sp>
-      <p:sp>
-        <p:nvSpPr>
-          <p:cNvPr id="17" name="Text 15"/>
-          <p:cNvSpPr txBox="1"/>
-          <p:nvPr/>
-        </p:nvSpPr>
-        <p:spPr>
-          <a:xfrm>
-            <a:off x="6537960" y="3977640"/>
-            <a:ext cx="4754880" cy="365760"/>
-          </a:xfrm>
-          <a:prstGeom prst="rect">
-            <a:avLst/>
-          </a:prstGeom>
-          <a:noFill/>
-          <a:ln/>
-        </p:spPr>
-        <p:txBody>
-          <a:bodyPr wrap="square" lIns="0" tIns="0" rIns="0" bIns="0" rtlCol="0" anchor="ctr"/>
-          <a:lstStyle/>
-          <a:p>
-            <a:pPr indent="0" marL="0">
-              <a:buNone/>
-            </a:pPr>
-            <a:r>
-              <a:rPr lang="en-US" sz="1600" b="1" dirty="0">
-                <a:solidFill>
-                  <a:srgbClr val="08A6A6"/>
-                </a:solidFill>
-                <a:latin typeface="IBM Plex Sans" pitchFamily="34" charset="0"/>
-                <a:ea typeface="IBM Plex Sans" pitchFamily="34" charset="-122"/>
-                <a:cs typeface="IBM Plex Sans" pitchFamily="34" charset="-120"/>
-              </a:rPr>
-              <a:t>Data protection law</a:t>
-            </a:r>
-            <a:endParaRPr lang="en-US" sz="1600" dirty="0"/>
-          </a:p>
-        </p:txBody>
-      </p:sp>
-      <p:sp>
-        <p:nvSpPr>
-          <p:cNvPr id="18" name="Text 16"/>
-          <p:cNvSpPr txBox="1"/>
-          <p:nvPr/>
-        </p:nvSpPr>
-        <p:spPr>
-          <a:xfrm>
-            <a:off x="6537960" y="4361688"/>
-            <a:ext cx="4754880" cy="1005840"/>
-          </a:xfrm>
-          <a:prstGeom prst="rect">
-            <a:avLst/>
-          </a:prstGeom>
-          <a:noFill/>
-          <a:ln/>
-        </p:spPr>
-        <p:txBody>
-          <a:bodyPr wrap="square" lIns="0" tIns="0" rIns="0" bIns="0" rtlCol="0" anchor="t"/>
-          <a:lstStyle/>
-          <a:p>
-            <a:pPr indent="0" marL="0">
-              <a:lnSpc>
-                <a:spcPct val="120000"/>
-              </a:lnSpc>
-              <a:buNone/>
-            </a:pPr>
-            <a:r>
-              <a:rPr lang="en-US" sz="1300" dirty="0">
-                <a:solidFill>
-                  <a:srgbClr val="667085"/>
-                </a:solidFill>
-                <a:latin typeface="IBM Plex Sans" pitchFamily="34" charset="0"/>
-                <a:ea typeface="IBM Plex Sans" pitchFamily="34" charset="-122"/>
-                <a:cs typeface="IBM Plex Sans" pitchFamily="34" charset="-120"/>
-              </a:rPr>
-              <a:t>UK law requires organisations to protect personal data. Serious breaches can lead to very large fines.</a:t>
-            </a:r>
-            <a:endParaRPr lang="en-US" sz="1300" dirty="0"/>
           </a:p>
         </p:txBody>
       </p:sp>
@@ -3976,7 +4223,7 @@
                 <a:ea typeface="IBM Plex Sans" pitchFamily="34" charset="-122"/>
                 <a:cs typeface="IBM Plex Sans" pitchFamily="34" charset="-120"/>
               </a:rPr>
-              <a:t>Exam practice</a:t>
+              <a:t>Worth knowing</a:t>
             </a:r>
             <a:endParaRPr lang="en-US" sz="3200" dirty="0"/>
           </a:p>
@@ -4015,7 +4262,7 @@
                 <a:ea typeface="IBM Plex Sans" pitchFamily="34" charset="-122"/>
                 <a:cs typeface="IBM Plex Sans" pitchFamily="34" charset="-120"/>
               </a:rPr>
-              <a:t>Devices away. Answer from memory on the worksheet.</a:t>
+              <a:t>The information markers dotted around the room</a:t>
             </a:r>
             <a:endParaRPr lang="en-US" sz="1500" dirty="0"/>
           </a:p>
@@ -4030,11 +4277,11 @@
         <p:spPr>
           <a:xfrm>
             <a:off x="502920" y="1828800"/>
-            <a:ext cx="11155680" cy="1097280"/>
+            <a:ext cx="5394960" cy="1737360"/>
           </a:xfrm>
           <a:prstGeom prst="roundRect">
             <a:avLst>
-              <a:gd name="adj" fmla="val 10000"/>
+              <a:gd name="adj" fmla="val 6316"/>
             </a:avLst>
           </a:prstGeom>
           <a:solidFill>
@@ -4042,7 +4289,7 @@
           </a:solidFill>
           <a:ln w="15875">
             <a:solidFill>
-              <a:srgbClr val="D9DEE7"/>
+              <a:srgbClr val="2D63FF"/>
             </a:solidFill>
             <a:prstDash val="solid"/>
           </a:ln>
@@ -4056,8 +4303,8 @@
         </p:nvSpPr>
         <p:spPr>
           <a:xfrm>
-            <a:off x="914400" y="1938528"/>
-            <a:ext cx="9418320" cy="877824"/>
+            <a:off x="822960" y="2011680"/>
+            <a:ext cx="4754880" cy="365760"/>
           </a:xfrm>
           <a:prstGeom prst="rect">
             <a:avLst/>
@@ -4070,101 +4317,79 @@
           <a:lstStyle/>
           <a:p>
             <a:pPr indent="0" marL="0">
-              <a:lnSpc>
-                <a:spcPct val="118000"/>
-              </a:lnSpc>
-              <a:buNone/>
-            </a:pPr>
-            <a:r>
-              <a:rPr lang="en-US" sz="1700" dirty="0">
-                <a:solidFill>
-                  <a:srgbClr val="101828"/>
+              <a:buNone/>
+            </a:pPr>
+            <a:r>
+              <a:rPr lang="en-US" sz="1600" b="1" dirty="0">
+                <a:solidFill>
+                  <a:srgbClr val="2D63FF"/>
                 </a:solidFill>
                 <a:latin typeface="IBM Plex Sans" pitchFamily="34" charset="0"/>
                 <a:ea typeface="IBM Plex Sans" pitchFamily="34" charset="-122"/>
                 <a:cs typeface="IBM Plex Sans" pitchFamily="34" charset="-120"/>
               </a:rPr>
-              <a:t>Describe how data can be intercepted as it travels across a network.</a:t>
-            </a:r>
-            <a:endParaRPr lang="en-US" sz="1700" dirty="0"/>
-          </a:p>
-        </p:txBody>
-      </p:sp>
-      <p:sp>
-        <p:nvSpPr>
-          <p:cNvPr id="9" name="Shape 7"/>
+              <a:t>Wireshark</a:t>
+            </a:r>
+            <a:endParaRPr lang="en-US" sz="1600" dirty="0"/>
+          </a:p>
+        </p:txBody>
+      </p:sp>
+      <p:sp>
+        <p:nvSpPr>
+          <p:cNvPr id="9" name="Text 7"/>
+          <p:cNvSpPr txBox="1"/>
+          <p:nvPr/>
+        </p:nvSpPr>
+        <p:spPr>
+          <a:xfrm>
+            <a:off x="822960" y="2395728"/>
+            <a:ext cx="4754880" cy="1005840"/>
+          </a:xfrm>
+          <a:prstGeom prst="rect">
+            <a:avLst/>
+          </a:prstGeom>
+          <a:noFill/>
+          <a:ln/>
+        </p:spPr>
+        <p:txBody>
+          <a:bodyPr wrap="square" lIns="0" tIns="0" rIns="0" bIns="0" rtlCol="0" anchor="t"/>
+          <a:lstStyle/>
+          <a:p>
+            <a:pPr indent="0" marL="0">
+              <a:lnSpc>
+                <a:spcPct val="120000"/>
+              </a:lnSpc>
+              <a:buNone/>
+            </a:pPr>
+            <a:r>
+              <a:rPr lang="en-US" sz="1300" dirty="0">
+                <a:solidFill>
+                  <a:srgbClr val="667085"/>
+                </a:solidFill>
+                <a:latin typeface="IBM Plex Sans" pitchFamily="34" charset="0"/>
+                <a:ea typeface="IBM Plex Sans" pitchFamily="34" charset="-122"/>
+                <a:cs typeface="IBM Plex Sans" pitchFamily="34" charset="-120"/>
+              </a:rPr>
+              <a:t>Wireshark is a free packet sniffer used by network managers worldwide. The same tool in the wrong hands is an attacker's dream.</a:t>
+            </a:r>
+            <a:endParaRPr lang="en-US" sz="1300" dirty="0"/>
+          </a:p>
+        </p:txBody>
+      </p:sp>
+      <p:sp>
+        <p:nvSpPr>
+          <p:cNvPr id="10" name="Shape 8"/>
           <p:cNvSpPr/>
           <p:nvPr/>
         </p:nvSpPr>
         <p:spPr>
           <a:xfrm>
-            <a:off x="10515600" y="2130552"/>
-            <a:ext cx="868680" cy="493776"/>
+            <a:off x="6217920" y="1828800"/>
+            <a:ext cx="5394960" cy="1737360"/>
           </a:xfrm>
           <a:prstGeom prst="roundRect">
             <a:avLst>
-              <a:gd name="adj" fmla="val 18519"/>
-            </a:avLst>
-          </a:prstGeom>
-          <a:solidFill>
-            <a:srgbClr val="EEF2FB"/>
-          </a:solidFill>
-          <a:ln/>
-        </p:spPr>
-      </p:sp>
-      <p:sp>
-        <p:nvSpPr>
-          <p:cNvPr id="10" name="Text 8"/>
-          <p:cNvSpPr txBox="1"/>
-          <p:nvPr/>
-        </p:nvSpPr>
-        <p:spPr>
-          <a:xfrm>
-            <a:off x="10515600" y="2130552"/>
-            <a:ext cx="868680" cy="493776"/>
-          </a:xfrm>
-          <a:prstGeom prst="rect">
-            <a:avLst/>
-          </a:prstGeom>
-          <a:noFill/>
-          <a:ln/>
-        </p:spPr>
-        <p:txBody>
-          <a:bodyPr wrap="square" lIns="0" tIns="0" rIns="0" bIns="0" rtlCol="0" anchor="ctr"/>
-          <a:lstStyle/>
-          <a:p>
-            <a:pPr algn="ctr" indent="0" marL="0">
-              <a:buNone/>
-            </a:pPr>
-            <a:r>
-              <a:rPr lang="en-US" sz="1500" b="1" dirty="0">
-                <a:solidFill>
-                  <a:srgbClr val="2D63FF"/>
-                </a:solidFill>
-                <a:latin typeface="IBM Plex Mono" pitchFamily="34" charset="0"/>
-                <a:ea typeface="IBM Plex Mono" pitchFamily="34" charset="-122"/>
-                <a:cs typeface="IBM Plex Mono" pitchFamily="34" charset="-120"/>
-              </a:rPr>
-              <a:t>[2]</a:t>
-            </a:r>
-            <a:endParaRPr lang="en-US" sz="1500" dirty="0"/>
-          </a:p>
-        </p:txBody>
-      </p:sp>
-      <p:sp>
-        <p:nvSpPr>
-          <p:cNvPr id="11" name="Shape 9"/>
-          <p:cNvSpPr/>
-          <p:nvPr/>
-        </p:nvSpPr>
-        <p:spPr>
-          <a:xfrm>
-            <a:off x="502920" y="3127248"/>
-            <a:ext cx="11155680" cy="1097280"/>
-          </a:xfrm>
-          <a:prstGeom prst="roundRect">
-            <a:avLst>
-              <a:gd name="adj" fmla="val 10000"/>
+              <a:gd name="adj" fmla="val 6316"/>
             </a:avLst>
           </a:prstGeom>
           <a:solidFill>
@@ -4172,7 +4397,7 @@
           </a:solidFill>
           <a:ln w="15875">
             <a:solidFill>
-              <a:srgbClr val="D9DEE7"/>
+              <a:srgbClr val="08A6A6"/>
             </a:solidFill>
             <a:prstDash val="solid"/>
           </a:ln>
@@ -4180,14 +4405,14 @@
       </p:sp>
       <p:sp>
         <p:nvSpPr>
-          <p:cNvPr id="12" name="Text 10"/>
-          <p:cNvSpPr txBox="1"/>
-          <p:nvPr/>
-        </p:nvSpPr>
-        <p:spPr>
-          <a:xfrm>
-            <a:off x="914400" y="3236976"/>
-            <a:ext cx="9418320" cy="877824"/>
+          <p:cNvPr id="11" name="Text 9"/>
+          <p:cNvSpPr txBox="1"/>
+          <p:nvPr/>
+        </p:nvSpPr>
+        <p:spPr>
+          <a:xfrm>
+            <a:off x="6537960" y="2011680"/>
+            <a:ext cx="4754880" cy="365760"/>
           </a:xfrm>
           <a:prstGeom prst="rect">
             <a:avLst/>
@@ -4200,23 +4425,62 @@
           <a:lstStyle/>
           <a:p>
             <a:pPr indent="0" marL="0">
-              <a:lnSpc>
-                <a:spcPct val="118000"/>
-              </a:lnSpc>
-              <a:buNone/>
-            </a:pPr>
-            <a:r>
-              <a:rPr lang="en-US" sz="1700" dirty="0">
-                <a:solidFill>
-                  <a:srgbClr val="101828"/>
+              <a:buNone/>
+            </a:pPr>
+            <a:r>
+              <a:rPr lang="en-US" sz="1600" b="1" dirty="0">
+                <a:solidFill>
+                  <a:srgbClr val="08A6A6"/>
                 </a:solidFill>
                 <a:latin typeface="IBM Plex Sans" pitchFamily="34" charset="0"/>
                 <a:ea typeface="IBM Plex Sans" pitchFamily="34" charset="-122"/>
                 <a:cs typeface="IBM Plex Sans" pitchFamily="34" charset="-120"/>
               </a:rPr>
-              <a:t>Explain why encryption makes intercepted data useless to an attacker.</a:t>
-            </a:r>
-            <a:endParaRPr lang="en-US" sz="1700" dirty="0"/>
+              <a:t>HTTPS everywhere</a:t>
+            </a:r>
+            <a:endParaRPr lang="en-US" sz="1600" dirty="0"/>
+          </a:p>
+        </p:txBody>
+      </p:sp>
+      <p:sp>
+        <p:nvSpPr>
+          <p:cNvPr id="12" name="Text 10"/>
+          <p:cNvSpPr txBox="1"/>
+          <p:nvPr/>
+        </p:nvSpPr>
+        <p:spPr>
+          <a:xfrm>
+            <a:off x="6537960" y="2395728"/>
+            <a:ext cx="4754880" cy="1005840"/>
+          </a:xfrm>
+          <a:prstGeom prst="rect">
+            <a:avLst/>
+          </a:prstGeom>
+          <a:noFill/>
+          <a:ln/>
+        </p:spPr>
+        <p:txBody>
+          <a:bodyPr wrap="square" lIns="0" tIns="0" rIns="0" bIns="0" rtlCol="0" anchor="t"/>
+          <a:lstStyle/>
+          <a:p>
+            <a:pPr indent="0" marL="0">
+              <a:lnSpc>
+                <a:spcPct val="120000"/>
+              </a:lnSpc>
+              <a:buNone/>
+            </a:pPr>
+            <a:r>
+              <a:rPr lang="en-US" sz="1300" dirty="0">
+                <a:solidFill>
+                  <a:srgbClr val="667085"/>
+                </a:solidFill>
+                <a:latin typeface="IBM Plex Sans" pitchFamily="34" charset="0"/>
+                <a:ea typeface="IBM Plex Sans" pitchFamily="34" charset="-122"/>
+                <a:cs typeface="IBM Plex Sans" pitchFamily="34" charset="-120"/>
+              </a:rPr>
+              <a:t>Most websites now use HTTPS by default, which is why intercepting browsing is far less useful than it once was.</a:t>
+            </a:r>
+            <a:endParaRPr lang="en-US" sz="1300" dirty="0"/>
           </a:p>
         </p:txBody>
       </p:sp>
@@ -4228,73 +4492,12 @@
         </p:nvSpPr>
         <p:spPr>
           <a:xfrm>
-            <a:off x="10515600" y="3429000"/>
-            <a:ext cx="868680" cy="493776"/>
+            <a:off x="502920" y="3794760"/>
+            <a:ext cx="5394960" cy="1737360"/>
           </a:xfrm>
           <a:prstGeom prst="roundRect">
             <a:avLst>
-              <a:gd name="adj" fmla="val 18519"/>
-            </a:avLst>
-          </a:prstGeom>
-          <a:solidFill>
-            <a:srgbClr val="EEF2FB"/>
-          </a:solidFill>
-          <a:ln/>
-        </p:spPr>
-      </p:sp>
-      <p:sp>
-        <p:nvSpPr>
-          <p:cNvPr id="14" name="Text 12"/>
-          <p:cNvSpPr txBox="1"/>
-          <p:nvPr/>
-        </p:nvSpPr>
-        <p:spPr>
-          <a:xfrm>
-            <a:off x="10515600" y="3429000"/>
-            <a:ext cx="868680" cy="493776"/>
-          </a:xfrm>
-          <a:prstGeom prst="rect">
-            <a:avLst/>
-          </a:prstGeom>
-          <a:noFill/>
-          <a:ln/>
-        </p:spPr>
-        <p:txBody>
-          <a:bodyPr wrap="square" lIns="0" tIns="0" rIns="0" bIns="0" rtlCol="0" anchor="ctr"/>
-          <a:lstStyle/>
-          <a:p>
-            <a:pPr algn="ctr" indent="0" marL="0">
-              <a:buNone/>
-            </a:pPr>
-            <a:r>
-              <a:rPr lang="en-US" sz="1500" b="1" dirty="0">
-                <a:solidFill>
-                  <a:srgbClr val="2D63FF"/>
-                </a:solidFill>
-                <a:latin typeface="IBM Plex Mono" pitchFamily="34" charset="0"/>
-                <a:ea typeface="IBM Plex Mono" pitchFamily="34" charset="-122"/>
-                <a:cs typeface="IBM Plex Mono" pitchFamily="34" charset="-120"/>
-              </a:rPr>
-              <a:t>[3]</a:t>
-            </a:r>
-            <a:endParaRPr lang="en-US" sz="1500" dirty="0"/>
-          </a:p>
-        </p:txBody>
-      </p:sp>
-      <p:sp>
-        <p:nvSpPr>
-          <p:cNvPr id="15" name="Shape 13"/>
-          <p:cNvSpPr/>
-          <p:nvPr/>
-        </p:nvSpPr>
-        <p:spPr>
-          <a:xfrm>
-            <a:off x="502920" y="4425696"/>
-            <a:ext cx="11155680" cy="1097280"/>
-          </a:xfrm>
-          <a:prstGeom prst="roundRect">
-            <a:avLst>
-              <a:gd name="adj" fmla="val 10000"/>
+              <a:gd name="adj" fmla="val 6316"/>
             </a:avLst>
           </a:prstGeom>
           <a:solidFill>
@@ -4302,7 +4505,7 @@
           </a:solidFill>
           <a:ln w="15875">
             <a:solidFill>
-              <a:srgbClr val="D9DEE7"/>
+              <a:srgbClr val="2D63FF"/>
             </a:solidFill>
             <a:prstDash val="solid"/>
           </a:ln>
@@ -4310,14 +4513,14 @@
       </p:sp>
       <p:sp>
         <p:nvSpPr>
-          <p:cNvPr id="16" name="Text 14"/>
-          <p:cNvSpPr txBox="1"/>
-          <p:nvPr/>
-        </p:nvSpPr>
-        <p:spPr>
-          <a:xfrm>
-            <a:off x="914400" y="4535424"/>
-            <a:ext cx="9418320" cy="877824"/>
+          <p:cNvPr id="14" name="Text 12"/>
+          <p:cNvSpPr txBox="1"/>
+          <p:nvPr/>
+        </p:nvSpPr>
+        <p:spPr>
+          <a:xfrm>
+            <a:off x="822960" y="3977640"/>
+            <a:ext cx="4754880" cy="365760"/>
           </a:xfrm>
           <a:prstGeom prst="rect">
             <a:avLst/>
@@ -4330,47 +4533,130 @@
           <a:lstStyle/>
           <a:p>
             <a:pPr indent="0" marL="0">
-              <a:lnSpc>
-                <a:spcPct val="118000"/>
-              </a:lnSpc>
-              <a:buNone/>
-            </a:pPr>
-            <a:r>
-              <a:rPr lang="en-US" sz="1700" dirty="0">
-                <a:solidFill>
-                  <a:srgbClr val="101828"/>
+              <a:buNone/>
+            </a:pPr>
+            <a:r>
+              <a:rPr lang="en-US" sz="1600" b="1" dirty="0">
+                <a:solidFill>
+                  <a:srgbClr val="2D63FF"/>
                 </a:solidFill>
                 <a:latin typeface="IBM Plex Sans" pitchFamily="34" charset="0"/>
                 <a:ea typeface="IBM Plex Sans" pitchFamily="34" charset="-122"/>
                 <a:cs typeface="IBM Plex Sans" pitchFamily="34" charset="-120"/>
               </a:rPr>
-              <a:t>Describe two further measures that reduce the risk of data theft in an office.</a:t>
-            </a:r>
-            <a:endParaRPr lang="en-US" sz="1700" dirty="0"/>
-          </a:p>
-        </p:txBody>
-      </p:sp>
-      <p:sp>
-        <p:nvSpPr>
-          <p:cNvPr id="17" name="Shape 15"/>
+              <a:t>Evil twin</a:t>
+            </a:r>
+            <a:endParaRPr lang="en-US" sz="1600" dirty="0"/>
+          </a:p>
+        </p:txBody>
+      </p:sp>
+      <p:sp>
+        <p:nvSpPr>
+          <p:cNvPr id="15" name="Text 13"/>
+          <p:cNvSpPr txBox="1"/>
+          <p:nvPr/>
+        </p:nvSpPr>
+        <p:spPr>
+          <a:xfrm>
+            <a:off x="822960" y="4361688"/>
+            <a:ext cx="4754880" cy="1005840"/>
+          </a:xfrm>
+          <a:prstGeom prst="rect">
+            <a:avLst/>
+          </a:prstGeom>
+          <a:noFill/>
+          <a:ln/>
+        </p:spPr>
+        <p:txBody>
+          <a:bodyPr wrap="square" lIns="0" tIns="0" rIns="0" bIns="0" rtlCol="0" anchor="t"/>
+          <a:lstStyle/>
+          <a:p>
+            <a:pPr indent="0" marL="0">
+              <a:lnSpc>
+                <a:spcPct val="120000"/>
+              </a:lnSpc>
+              <a:buNone/>
+            </a:pPr>
+            <a:r>
+              <a:rPr lang="en-US" sz="1300" dirty="0">
+                <a:solidFill>
+                  <a:srgbClr val="667085"/>
+                </a:solidFill>
+                <a:latin typeface="IBM Plex Sans" pitchFamily="34" charset="0"/>
+                <a:ea typeface="IBM Plex Sans" pitchFamily="34" charset="-122"/>
+                <a:cs typeface="IBM Plex Sans" pitchFamily="34" charset="-120"/>
+              </a:rPr>
+              <a:t>A fake hotspot with the same name as a real one is called an evil twin. Phones may join it automatically.</a:t>
+            </a:r>
+            <a:endParaRPr lang="en-US" sz="1300" dirty="0"/>
+          </a:p>
+        </p:txBody>
+      </p:sp>
+      <p:sp>
+        <p:nvSpPr>
+          <p:cNvPr id="16" name="Shape 14"/>
           <p:cNvSpPr/>
           <p:nvPr/>
         </p:nvSpPr>
         <p:spPr>
           <a:xfrm>
-            <a:off x="10515600" y="4727448"/>
-            <a:ext cx="868680" cy="493776"/>
+            <a:off x="6217920" y="3794760"/>
+            <a:ext cx="5394960" cy="1737360"/>
           </a:xfrm>
           <a:prstGeom prst="roundRect">
             <a:avLst>
-              <a:gd name="adj" fmla="val 18519"/>
+              <a:gd name="adj" fmla="val 6316"/>
             </a:avLst>
           </a:prstGeom>
           <a:solidFill>
-            <a:srgbClr val="EEF2FB"/>
+            <a:srgbClr val="FFFFFF"/>
           </a:solidFill>
-          <a:ln/>
-        </p:spPr>
+          <a:ln w="15875">
+            <a:solidFill>
+              <a:srgbClr val="08A6A6"/>
+            </a:solidFill>
+            <a:prstDash val="solid"/>
+          </a:ln>
+        </p:spPr>
+      </p:sp>
+      <p:sp>
+        <p:nvSpPr>
+          <p:cNvPr id="17" name="Text 15"/>
+          <p:cNvSpPr txBox="1"/>
+          <p:nvPr/>
+        </p:nvSpPr>
+        <p:spPr>
+          <a:xfrm>
+            <a:off x="6537960" y="3977640"/>
+            <a:ext cx="4754880" cy="365760"/>
+          </a:xfrm>
+          <a:prstGeom prst="rect">
+            <a:avLst/>
+          </a:prstGeom>
+          <a:noFill/>
+          <a:ln/>
+        </p:spPr>
+        <p:txBody>
+          <a:bodyPr wrap="square" lIns="0" tIns="0" rIns="0" bIns="0" rtlCol="0" anchor="ctr"/>
+          <a:lstStyle/>
+          <a:p>
+            <a:pPr indent="0" marL="0">
+              <a:buNone/>
+            </a:pPr>
+            <a:r>
+              <a:rPr lang="en-US" sz="1600" b="1" dirty="0">
+                <a:solidFill>
+                  <a:srgbClr val="08A6A6"/>
+                </a:solidFill>
+                <a:latin typeface="IBM Plex Sans" pitchFamily="34" charset="0"/>
+                <a:ea typeface="IBM Plex Sans" pitchFamily="34" charset="-122"/>
+                <a:cs typeface="IBM Plex Sans" pitchFamily="34" charset="-120"/>
+              </a:rPr>
+              <a:t>Data protection law</a:t>
+            </a:r>
+            <a:endParaRPr lang="en-US" sz="1600" dirty="0"/>
+          </a:p>
+        </p:txBody>
       </p:sp>
       <p:sp>
         <p:nvSpPr>
@@ -4380,34 +4666,37 @@
         </p:nvSpPr>
         <p:spPr>
           <a:xfrm>
-            <a:off x="10515600" y="4727448"/>
-            <a:ext cx="868680" cy="493776"/>
-          </a:xfrm>
-          <a:prstGeom prst="rect">
-            <a:avLst/>
-          </a:prstGeom>
-          <a:noFill/>
-          <a:ln/>
-        </p:spPr>
-        <p:txBody>
-          <a:bodyPr wrap="square" lIns="0" tIns="0" rIns="0" bIns="0" rtlCol="0" anchor="ctr"/>
-          <a:lstStyle/>
-          <a:p>
-            <a:pPr algn="ctr" indent="0" marL="0">
-              <a:buNone/>
-            </a:pPr>
-            <a:r>
-              <a:rPr lang="en-US" sz="1500" b="1" dirty="0">
-                <a:solidFill>
-                  <a:srgbClr val="2D63FF"/>
-                </a:solidFill>
-                <a:latin typeface="IBM Plex Mono" pitchFamily="34" charset="0"/>
-                <a:ea typeface="IBM Plex Mono" pitchFamily="34" charset="-122"/>
-                <a:cs typeface="IBM Plex Mono" pitchFamily="34" charset="-120"/>
-              </a:rPr>
-              <a:t>[4]</a:t>
-            </a:r>
-            <a:endParaRPr lang="en-US" sz="1500" dirty="0"/>
+            <a:off x="6537960" y="4361688"/>
+            <a:ext cx="4754880" cy="1005840"/>
+          </a:xfrm>
+          <a:prstGeom prst="rect">
+            <a:avLst/>
+          </a:prstGeom>
+          <a:noFill/>
+          <a:ln/>
+        </p:spPr>
+        <p:txBody>
+          <a:bodyPr wrap="square" lIns="0" tIns="0" rIns="0" bIns="0" rtlCol="0" anchor="t"/>
+          <a:lstStyle/>
+          <a:p>
+            <a:pPr indent="0" marL="0">
+              <a:lnSpc>
+                <a:spcPct val="120000"/>
+              </a:lnSpc>
+              <a:buNone/>
+            </a:pPr>
+            <a:r>
+              <a:rPr lang="en-US" sz="1300" dirty="0">
+                <a:solidFill>
+                  <a:srgbClr val="667085"/>
+                </a:solidFill>
+                <a:latin typeface="IBM Plex Sans" pitchFamily="34" charset="0"/>
+                <a:ea typeface="IBM Plex Sans" pitchFamily="34" charset="-122"/>
+                <a:cs typeface="IBM Plex Sans" pitchFamily="34" charset="-120"/>
+              </a:rPr>
+              <a:t>UK law requires organisations to protect personal data. Serious breaches can lead to very large fines.</a:t>
+            </a:r>
+            <a:endParaRPr lang="en-US" sz="1300" dirty="0"/>
           </a:p>
         </p:txBody>
       </p:sp>
@@ -4422,6 +4711,604 @@
 <file path=ppt/slides/slide14.xml><?xml version="1.0" encoding="utf-8"?>
 <p:sld xmlns:a="http://schemas.openxmlformats.org/drawingml/2006/main" xmlns:r="http://schemas.openxmlformats.org/officeDocument/2006/relationships" xmlns:p="http://schemas.openxmlformats.org/presentationml/2006/main">
   <p:cSld name="Slide 14">
+    <p:bg>
+      <p:bgPr>
+        <a:solidFill>
+          <a:srgbClr val="F7F7F4"/>
+        </a:solidFill>
+      </p:bgPr>
+    </p:bg>
+    <p:spTree>
+      <p:nvGrpSpPr>
+        <p:cNvPr id="1" name=""/>
+        <p:cNvGrpSpPr/>
+        <p:nvPr/>
+      </p:nvGrpSpPr>
+      <p:grpSpPr>
+        <a:xfrm>
+          <a:off x="0" y="0"/>
+          <a:ext cx="0" cy="0"/>
+          <a:chOff x="0" y="0"/>
+          <a:chExt cx="0" cy="0"/>
+        </a:xfrm>
+      </p:grpSpPr>
+      <p:sp>
+        <p:nvSpPr>
+          <p:cNvPr id="2" name="Shape 0"/>
+          <p:cNvSpPr/>
+          <p:nvPr/>
+        </p:nvSpPr>
+        <p:spPr>
+          <a:xfrm>
+            <a:off x="0" y="0"/>
+            <a:ext cx="12188952" cy="82296"/>
+          </a:xfrm>
+          <a:prstGeom prst="rect">
+            <a:avLst/>
+          </a:prstGeom>
+          <a:solidFill>
+            <a:srgbClr val="2D63FF"/>
+          </a:solidFill>
+          <a:ln/>
+        </p:spPr>
+      </p:sp>
+      <p:sp>
+        <p:nvSpPr>
+          <p:cNvPr id="3" name="Text 1"/>
+          <p:cNvSpPr txBox="1"/>
+          <p:nvPr/>
+        </p:nvSpPr>
+        <p:spPr>
+          <a:xfrm>
+            <a:off x="502920" y="6236208"/>
+            <a:ext cx="7772400" cy="365760"/>
+          </a:xfrm>
+          <a:prstGeom prst="rect">
+            <a:avLst/>
+          </a:prstGeom>
+          <a:noFill/>
+          <a:ln/>
+        </p:spPr>
+        <p:txBody>
+          <a:bodyPr wrap="square" lIns="0" tIns="0" rIns="0" bIns="0" rtlCol="0" anchor="ctr"/>
+          <a:lstStyle/>
+          <a:p>
+            <a:pPr indent="0" marL="0">
+              <a:buNone/>
+            </a:pPr>
+            <a:r>
+              <a:rPr lang="en-US" sz="1100" dirty="0">
+                <a:solidFill>
+                  <a:srgbClr val="667085"/>
+                </a:solidFill>
+                <a:latin typeface="IBM Plex Mono" pitchFamily="34" charset="0"/>
+                <a:ea typeface="IBM Plex Mono" pitchFamily="34" charset="-122"/>
+                <a:cs typeface="IBM Plex Mono" pitchFamily="34" charset="-120"/>
+              </a:rPr>
+              <a:t>1.4 Network security  |  Lesson 8</a:t>
+            </a:r>
+            <a:endParaRPr lang="en-US" sz="1100" dirty="0"/>
+          </a:p>
+        </p:txBody>
+      </p:sp>
+      <p:sp>
+        <p:nvSpPr>
+          <p:cNvPr id="4" name="Text 2"/>
+          <p:cNvSpPr txBox="1"/>
+          <p:nvPr/>
+        </p:nvSpPr>
+        <p:spPr>
+          <a:xfrm>
+            <a:off x="9326880" y="6236208"/>
+            <a:ext cx="2377440" cy="365760"/>
+          </a:xfrm>
+          <a:prstGeom prst="rect">
+            <a:avLst/>
+          </a:prstGeom>
+          <a:noFill/>
+          <a:ln/>
+        </p:spPr>
+        <p:txBody>
+          <a:bodyPr wrap="square" lIns="0" tIns="0" rIns="0" bIns="0" rtlCol="0" anchor="ctr"/>
+          <a:lstStyle/>
+          <a:p>
+            <a:pPr algn="r" indent="0" marL="0">
+              <a:buNone/>
+            </a:pPr>
+            <a:r>
+              <a:rPr lang="en-US" sz="1100" dirty="0">
+                <a:solidFill>
+                  <a:srgbClr val="667085"/>
+                </a:solidFill>
+                <a:latin typeface="IBM Plex Mono" pitchFamily="34" charset="0"/>
+                <a:ea typeface="IBM Plex Mono" pitchFamily="34" charset="-122"/>
+                <a:cs typeface="IBM Plex Mono" pitchFamily="34" charset="-120"/>
+              </a:rPr>
+              <a:t>Revise 360</a:t>
+            </a:r>
+            <a:endParaRPr lang="en-US" sz="1100" dirty="0"/>
+          </a:p>
+        </p:txBody>
+      </p:sp>
+      <p:sp>
+        <p:nvSpPr>
+          <p:cNvPr id="5" name="Text 3"/>
+          <p:cNvSpPr txBox="1"/>
+          <p:nvPr/>
+        </p:nvSpPr>
+        <p:spPr>
+          <a:xfrm>
+            <a:off x="502920" y="411480"/>
+            <a:ext cx="11155680" cy="777240"/>
+          </a:xfrm>
+          <a:prstGeom prst="rect">
+            <a:avLst/>
+          </a:prstGeom>
+          <a:noFill/>
+          <a:ln/>
+        </p:spPr>
+        <p:txBody>
+          <a:bodyPr wrap="square" lIns="0" tIns="0" rIns="0" bIns="0" rtlCol="0" anchor="ctr"/>
+          <a:lstStyle/>
+          <a:p>
+            <a:pPr indent="0" marL="0">
+              <a:buNone/>
+            </a:pPr>
+            <a:r>
+              <a:rPr lang="en-US" sz="3200" b="1" dirty="0">
+                <a:solidFill>
+                  <a:srgbClr val="101828"/>
+                </a:solidFill>
+                <a:latin typeface="IBM Plex Sans" pitchFamily="34" charset="0"/>
+                <a:ea typeface="IBM Plex Sans" pitchFamily="34" charset="-122"/>
+                <a:cs typeface="IBM Plex Sans" pitchFamily="34" charset="-120"/>
+              </a:rPr>
+              <a:t>Exam practice</a:t>
+            </a:r>
+            <a:endParaRPr lang="en-US" sz="3200" dirty="0"/>
+          </a:p>
+        </p:txBody>
+      </p:sp>
+      <p:sp>
+        <p:nvSpPr>
+          <p:cNvPr id="6" name="Text 4"/>
+          <p:cNvSpPr txBox="1"/>
+          <p:nvPr/>
+        </p:nvSpPr>
+        <p:spPr>
+          <a:xfrm>
+            <a:off x="502920" y="1170432"/>
+            <a:ext cx="11155680" cy="411480"/>
+          </a:xfrm>
+          <a:prstGeom prst="rect">
+            <a:avLst/>
+          </a:prstGeom>
+          <a:noFill/>
+          <a:ln/>
+        </p:spPr>
+        <p:txBody>
+          <a:bodyPr wrap="square" lIns="0" tIns="0" rIns="0" bIns="0" rtlCol="0" anchor="ctr"/>
+          <a:lstStyle/>
+          <a:p>
+            <a:pPr indent="0" marL="0">
+              <a:buNone/>
+            </a:pPr>
+            <a:r>
+              <a:rPr lang="en-US" sz="1500" dirty="0">
+                <a:solidFill>
+                  <a:srgbClr val="667085"/>
+                </a:solidFill>
+                <a:latin typeface="IBM Plex Sans" pitchFamily="34" charset="0"/>
+                <a:ea typeface="IBM Plex Sans" pitchFamily="34" charset="-122"/>
+                <a:cs typeface="IBM Plex Sans" pitchFamily="34" charset="-120"/>
+              </a:rPr>
+              <a:t>Devices away. Answer from memory on the worksheet.</a:t>
+            </a:r>
+            <a:endParaRPr lang="en-US" sz="1500" dirty="0"/>
+          </a:p>
+        </p:txBody>
+      </p:sp>
+      <p:sp>
+        <p:nvSpPr>
+          <p:cNvPr id="7" name="Shape 5"/>
+          <p:cNvSpPr/>
+          <p:nvPr/>
+        </p:nvSpPr>
+        <p:spPr>
+          <a:xfrm>
+            <a:off x="502920" y="1828800"/>
+            <a:ext cx="11155680" cy="1097280"/>
+          </a:xfrm>
+          <a:prstGeom prst="roundRect">
+            <a:avLst>
+              <a:gd name="adj" fmla="val 10000"/>
+            </a:avLst>
+          </a:prstGeom>
+          <a:solidFill>
+            <a:srgbClr val="FFFFFF"/>
+          </a:solidFill>
+          <a:ln w="15875">
+            <a:solidFill>
+              <a:srgbClr val="D9DEE7"/>
+            </a:solidFill>
+            <a:prstDash val="solid"/>
+          </a:ln>
+        </p:spPr>
+      </p:sp>
+      <p:sp>
+        <p:nvSpPr>
+          <p:cNvPr id="8" name="Text 6"/>
+          <p:cNvSpPr txBox="1"/>
+          <p:nvPr/>
+        </p:nvSpPr>
+        <p:spPr>
+          <a:xfrm>
+            <a:off x="914400" y="1938528"/>
+            <a:ext cx="9418320" cy="877824"/>
+          </a:xfrm>
+          <a:prstGeom prst="rect">
+            <a:avLst/>
+          </a:prstGeom>
+          <a:noFill/>
+          <a:ln/>
+        </p:spPr>
+        <p:txBody>
+          <a:bodyPr wrap="square" lIns="0" tIns="0" rIns="0" bIns="0" rtlCol="0" anchor="ctr"/>
+          <a:lstStyle/>
+          <a:p>
+            <a:pPr indent="0" marL="0">
+              <a:lnSpc>
+                <a:spcPct val="118000"/>
+              </a:lnSpc>
+              <a:buNone/>
+            </a:pPr>
+            <a:r>
+              <a:rPr lang="en-US" sz="1700" dirty="0">
+                <a:solidFill>
+                  <a:srgbClr val="101828"/>
+                </a:solidFill>
+                <a:latin typeface="IBM Plex Sans" pitchFamily="34" charset="0"/>
+                <a:ea typeface="IBM Plex Sans" pitchFamily="34" charset="-122"/>
+                <a:cs typeface="IBM Plex Sans" pitchFamily="34" charset="-120"/>
+              </a:rPr>
+              <a:t>Describe how data can be intercepted as it travels across a network.</a:t>
+            </a:r>
+            <a:endParaRPr lang="en-US" sz="1700" dirty="0"/>
+          </a:p>
+        </p:txBody>
+      </p:sp>
+      <p:sp>
+        <p:nvSpPr>
+          <p:cNvPr id="9" name="Shape 7"/>
+          <p:cNvSpPr/>
+          <p:nvPr/>
+        </p:nvSpPr>
+        <p:spPr>
+          <a:xfrm>
+            <a:off x="10515600" y="2130552"/>
+            <a:ext cx="868680" cy="493776"/>
+          </a:xfrm>
+          <a:prstGeom prst="roundRect">
+            <a:avLst>
+              <a:gd name="adj" fmla="val 18519"/>
+            </a:avLst>
+          </a:prstGeom>
+          <a:solidFill>
+            <a:srgbClr val="EEF2FB"/>
+          </a:solidFill>
+          <a:ln/>
+        </p:spPr>
+      </p:sp>
+      <p:sp>
+        <p:nvSpPr>
+          <p:cNvPr id="10" name="Text 8"/>
+          <p:cNvSpPr txBox="1"/>
+          <p:nvPr/>
+        </p:nvSpPr>
+        <p:spPr>
+          <a:xfrm>
+            <a:off x="10515600" y="2130552"/>
+            <a:ext cx="868680" cy="493776"/>
+          </a:xfrm>
+          <a:prstGeom prst="rect">
+            <a:avLst/>
+          </a:prstGeom>
+          <a:noFill/>
+          <a:ln/>
+        </p:spPr>
+        <p:txBody>
+          <a:bodyPr wrap="square" lIns="0" tIns="0" rIns="0" bIns="0" rtlCol="0" anchor="ctr"/>
+          <a:lstStyle/>
+          <a:p>
+            <a:pPr algn="ctr" indent="0" marL="0">
+              <a:buNone/>
+            </a:pPr>
+            <a:r>
+              <a:rPr lang="en-US" sz="1500" b="1" dirty="0">
+                <a:solidFill>
+                  <a:srgbClr val="2D63FF"/>
+                </a:solidFill>
+                <a:latin typeface="IBM Plex Mono" pitchFamily="34" charset="0"/>
+                <a:ea typeface="IBM Plex Mono" pitchFamily="34" charset="-122"/>
+                <a:cs typeface="IBM Plex Mono" pitchFamily="34" charset="-120"/>
+              </a:rPr>
+              <a:t>[2]</a:t>
+            </a:r>
+            <a:endParaRPr lang="en-US" sz="1500" dirty="0"/>
+          </a:p>
+        </p:txBody>
+      </p:sp>
+      <p:sp>
+        <p:nvSpPr>
+          <p:cNvPr id="11" name="Shape 9"/>
+          <p:cNvSpPr/>
+          <p:nvPr/>
+        </p:nvSpPr>
+        <p:spPr>
+          <a:xfrm>
+            <a:off x="502920" y="3127248"/>
+            <a:ext cx="11155680" cy="1097280"/>
+          </a:xfrm>
+          <a:prstGeom prst="roundRect">
+            <a:avLst>
+              <a:gd name="adj" fmla="val 10000"/>
+            </a:avLst>
+          </a:prstGeom>
+          <a:solidFill>
+            <a:srgbClr val="FFFFFF"/>
+          </a:solidFill>
+          <a:ln w="15875">
+            <a:solidFill>
+              <a:srgbClr val="D9DEE7"/>
+            </a:solidFill>
+            <a:prstDash val="solid"/>
+          </a:ln>
+        </p:spPr>
+      </p:sp>
+      <p:sp>
+        <p:nvSpPr>
+          <p:cNvPr id="12" name="Text 10"/>
+          <p:cNvSpPr txBox="1"/>
+          <p:nvPr/>
+        </p:nvSpPr>
+        <p:spPr>
+          <a:xfrm>
+            <a:off x="914400" y="3236976"/>
+            <a:ext cx="9418320" cy="877824"/>
+          </a:xfrm>
+          <a:prstGeom prst="rect">
+            <a:avLst/>
+          </a:prstGeom>
+          <a:noFill/>
+          <a:ln/>
+        </p:spPr>
+        <p:txBody>
+          <a:bodyPr wrap="square" lIns="0" tIns="0" rIns="0" bIns="0" rtlCol="0" anchor="ctr"/>
+          <a:lstStyle/>
+          <a:p>
+            <a:pPr indent="0" marL="0">
+              <a:lnSpc>
+                <a:spcPct val="118000"/>
+              </a:lnSpc>
+              <a:buNone/>
+            </a:pPr>
+            <a:r>
+              <a:rPr lang="en-US" sz="1700" dirty="0">
+                <a:solidFill>
+                  <a:srgbClr val="101828"/>
+                </a:solidFill>
+                <a:latin typeface="IBM Plex Sans" pitchFamily="34" charset="0"/>
+                <a:ea typeface="IBM Plex Sans" pitchFamily="34" charset="-122"/>
+                <a:cs typeface="IBM Plex Sans" pitchFamily="34" charset="-120"/>
+              </a:rPr>
+              <a:t>Explain why encryption makes intercepted data useless to an attacker.</a:t>
+            </a:r>
+            <a:endParaRPr lang="en-US" sz="1700" dirty="0"/>
+          </a:p>
+        </p:txBody>
+      </p:sp>
+      <p:sp>
+        <p:nvSpPr>
+          <p:cNvPr id="13" name="Shape 11"/>
+          <p:cNvSpPr/>
+          <p:nvPr/>
+        </p:nvSpPr>
+        <p:spPr>
+          <a:xfrm>
+            <a:off x="10515600" y="3429000"/>
+            <a:ext cx="868680" cy="493776"/>
+          </a:xfrm>
+          <a:prstGeom prst="roundRect">
+            <a:avLst>
+              <a:gd name="adj" fmla="val 18519"/>
+            </a:avLst>
+          </a:prstGeom>
+          <a:solidFill>
+            <a:srgbClr val="EEF2FB"/>
+          </a:solidFill>
+          <a:ln/>
+        </p:spPr>
+      </p:sp>
+      <p:sp>
+        <p:nvSpPr>
+          <p:cNvPr id="14" name="Text 12"/>
+          <p:cNvSpPr txBox="1"/>
+          <p:nvPr/>
+        </p:nvSpPr>
+        <p:spPr>
+          <a:xfrm>
+            <a:off x="10515600" y="3429000"/>
+            <a:ext cx="868680" cy="493776"/>
+          </a:xfrm>
+          <a:prstGeom prst="rect">
+            <a:avLst/>
+          </a:prstGeom>
+          <a:noFill/>
+          <a:ln/>
+        </p:spPr>
+        <p:txBody>
+          <a:bodyPr wrap="square" lIns="0" tIns="0" rIns="0" bIns="0" rtlCol="0" anchor="ctr"/>
+          <a:lstStyle/>
+          <a:p>
+            <a:pPr algn="ctr" indent="0" marL="0">
+              <a:buNone/>
+            </a:pPr>
+            <a:r>
+              <a:rPr lang="en-US" sz="1500" b="1" dirty="0">
+                <a:solidFill>
+                  <a:srgbClr val="2D63FF"/>
+                </a:solidFill>
+                <a:latin typeface="IBM Plex Mono" pitchFamily="34" charset="0"/>
+                <a:ea typeface="IBM Plex Mono" pitchFamily="34" charset="-122"/>
+                <a:cs typeface="IBM Plex Mono" pitchFamily="34" charset="-120"/>
+              </a:rPr>
+              <a:t>[3]</a:t>
+            </a:r>
+            <a:endParaRPr lang="en-US" sz="1500" dirty="0"/>
+          </a:p>
+        </p:txBody>
+      </p:sp>
+      <p:sp>
+        <p:nvSpPr>
+          <p:cNvPr id="15" name="Shape 13"/>
+          <p:cNvSpPr/>
+          <p:nvPr/>
+        </p:nvSpPr>
+        <p:spPr>
+          <a:xfrm>
+            <a:off x="502920" y="4425696"/>
+            <a:ext cx="11155680" cy="1097280"/>
+          </a:xfrm>
+          <a:prstGeom prst="roundRect">
+            <a:avLst>
+              <a:gd name="adj" fmla="val 10000"/>
+            </a:avLst>
+          </a:prstGeom>
+          <a:solidFill>
+            <a:srgbClr val="FFFFFF"/>
+          </a:solidFill>
+          <a:ln w="15875">
+            <a:solidFill>
+              <a:srgbClr val="D9DEE7"/>
+            </a:solidFill>
+            <a:prstDash val="solid"/>
+          </a:ln>
+        </p:spPr>
+      </p:sp>
+      <p:sp>
+        <p:nvSpPr>
+          <p:cNvPr id="16" name="Text 14"/>
+          <p:cNvSpPr txBox="1"/>
+          <p:nvPr/>
+        </p:nvSpPr>
+        <p:spPr>
+          <a:xfrm>
+            <a:off x="914400" y="4535424"/>
+            <a:ext cx="9418320" cy="877824"/>
+          </a:xfrm>
+          <a:prstGeom prst="rect">
+            <a:avLst/>
+          </a:prstGeom>
+          <a:noFill/>
+          <a:ln/>
+        </p:spPr>
+        <p:txBody>
+          <a:bodyPr wrap="square" lIns="0" tIns="0" rIns="0" bIns="0" rtlCol="0" anchor="ctr"/>
+          <a:lstStyle/>
+          <a:p>
+            <a:pPr indent="0" marL="0">
+              <a:lnSpc>
+                <a:spcPct val="118000"/>
+              </a:lnSpc>
+              <a:buNone/>
+            </a:pPr>
+            <a:r>
+              <a:rPr lang="en-US" sz="1700" dirty="0">
+                <a:solidFill>
+                  <a:srgbClr val="101828"/>
+                </a:solidFill>
+                <a:latin typeface="IBM Plex Sans" pitchFamily="34" charset="0"/>
+                <a:ea typeface="IBM Plex Sans" pitchFamily="34" charset="-122"/>
+                <a:cs typeface="IBM Plex Sans" pitchFamily="34" charset="-120"/>
+              </a:rPr>
+              <a:t>Describe two further measures that reduce the risk of data theft in an office.</a:t>
+            </a:r>
+            <a:endParaRPr lang="en-US" sz="1700" dirty="0"/>
+          </a:p>
+        </p:txBody>
+      </p:sp>
+      <p:sp>
+        <p:nvSpPr>
+          <p:cNvPr id="17" name="Shape 15"/>
+          <p:cNvSpPr/>
+          <p:nvPr/>
+        </p:nvSpPr>
+        <p:spPr>
+          <a:xfrm>
+            <a:off x="10515600" y="4727448"/>
+            <a:ext cx="868680" cy="493776"/>
+          </a:xfrm>
+          <a:prstGeom prst="roundRect">
+            <a:avLst>
+              <a:gd name="adj" fmla="val 18519"/>
+            </a:avLst>
+          </a:prstGeom>
+          <a:solidFill>
+            <a:srgbClr val="EEF2FB"/>
+          </a:solidFill>
+          <a:ln/>
+        </p:spPr>
+      </p:sp>
+      <p:sp>
+        <p:nvSpPr>
+          <p:cNvPr id="18" name="Text 16"/>
+          <p:cNvSpPr txBox="1"/>
+          <p:nvPr/>
+        </p:nvSpPr>
+        <p:spPr>
+          <a:xfrm>
+            <a:off x="10515600" y="4727448"/>
+            <a:ext cx="868680" cy="493776"/>
+          </a:xfrm>
+          <a:prstGeom prst="rect">
+            <a:avLst/>
+          </a:prstGeom>
+          <a:noFill/>
+          <a:ln/>
+        </p:spPr>
+        <p:txBody>
+          <a:bodyPr wrap="square" lIns="0" tIns="0" rIns="0" bIns="0" rtlCol="0" anchor="ctr"/>
+          <a:lstStyle/>
+          <a:p>
+            <a:pPr algn="ctr" indent="0" marL="0">
+              <a:buNone/>
+            </a:pPr>
+            <a:r>
+              <a:rPr lang="en-US" sz="1500" b="1" dirty="0">
+                <a:solidFill>
+                  <a:srgbClr val="2D63FF"/>
+                </a:solidFill>
+                <a:latin typeface="IBM Plex Mono" pitchFamily="34" charset="0"/>
+                <a:ea typeface="IBM Plex Mono" pitchFamily="34" charset="-122"/>
+                <a:cs typeface="IBM Plex Mono" pitchFamily="34" charset="-120"/>
+              </a:rPr>
+              <a:t>[4]</a:t>
+            </a:r>
+            <a:endParaRPr lang="en-US" sz="1500" dirty="0"/>
+          </a:p>
+        </p:txBody>
+      </p:sp>
+    </p:spTree>
+  </p:cSld>
+  <p:clrMapOvr>
+    <a:masterClrMapping/>
+  </p:clrMapOvr>
+</p:sld>
+</file>
+
+<file path=ppt/slides/slide15.xml><?xml version="1.0" encoding="utf-8"?>
+<p:sld xmlns:a="http://schemas.openxmlformats.org/drawingml/2006/main" xmlns:r="http://schemas.openxmlformats.org/officeDocument/2006/relationships" xmlns:p="http://schemas.openxmlformats.org/presentationml/2006/main">
+  <p:cSld name="Slide 15">
     <p:bg>
       <p:bgPr>
         <a:solidFill>
